--- a/Design/HLD/Project_LED-Playground_Drawing-Book.pptx
+++ b/Design/HLD/Project_LED-Playground_Drawing-Book.pptx
@@ -216,7 +216,7 @@
             <a:fld id="{80BF9A0C-5C43-49E1-BDB4-4396845E20E8}" type="datetimeFigureOut">
               <a:rPr lang="en-US" smtClean="0"/>
               <a:pPr/>
-              <a:t>6/21/2026</a:t>
+              <a:t>6/22/2026</a:t>
             </a:fld>
             <a:endParaRPr lang="en-IN"/>
           </a:p>
@@ -828,7 +828,7 @@
             <a:fld id="{58C583BC-C17B-4A11-BE14-DE3C9C2B222C}" type="datetime1">
               <a:rPr lang="en-US" smtClean="0"/>
               <a:pPr/>
-              <a:t>6/21/2026</a:t>
+              <a:t>6/22/2026</a:t>
             </a:fld>
             <a:endParaRPr lang="en-US"/>
           </a:p>
@@ -1421,7 +1421,7 @@
             <a:fld id="{B1EFFD99-0C14-4CF1-8AEB-0121A51B05BA}" type="datetime1">
               <a:rPr lang="en-US" smtClean="0"/>
               <a:pPr/>
-              <a:t>6/21/2026</a:t>
+              <a:t>6/22/2026</a:t>
             </a:fld>
             <a:endParaRPr lang="en-US"/>
           </a:p>
@@ -1910,7 +1910,7 @@
             <a:fld id="{B62DE450-3731-4FAA-B1A4-262C0CF065F4}" type="datetime1">
               <a:rPr lang="en-US" smtClean="0"/>
               <a:pPr/>
-              <a:t>6/21/2026</a:t>
+              <a:t>6/22/2026</a:t>
             </a:fld>
             <a:endParaRPr lang="en-US"/>
           </a:p>
@@ -2184,7 +2184,7 @@
             <a:fld id="{E21FA8B8-9644-43E1-9176-EA7D5ECBE882}" type="datetime1">
               <a:rPr lang="en-US" smtClean="0"/>
               <a:pPr/>
-              <a:t>6/21/2026</a:t>
+              <a:t>6/22/2026</a:t>
             </a:fld>
             <a:endParaRPr lang="en-US"/>
           </a:p>
@@ -2564,7 +2564,7 @@
             <a:fld id="{5418BCC3-C6D4-4487-976F-7CEA13B866D2}" type="datetime1">
               <a:rPr lang="en-US" smtClean="0"/>
               <a:pPr/>
-              <a:t>6/21/2026</a:t>
+              <a:t>6/22/2026</a:t>
             </a:fld>
             <a:endParaRPr lang="en-US"/>
           </a:p>
@@ -3050,7 +3050,7 @@
             <a:fld id="{8A78F357-C25C-430B-B354-1E99D4CDD541}" type="datetime1">
               <a:rPr lang="en-US" smtClean="0"/>
               <a:pPr/>
-              <a:t>6/21/2026</a:t>
+              <a:t>6/22/2026</a:t>
             </a:fld>
             <a:endParaRPr lang="en-US"/>
           </a:p>
@@ -3236,7 +3236,7 @@
             <a:fld id="{59505BE4-8205-4DD8-B4EA-9C3050254A24}" type="datetime1">
               <a:rPr lang="en-US" smtClean="0"/>
               <a:pPr/>
-              <a:t>6/21/2026</a:t>
+              <a:t>6/22/2026</a:t>
             </a:fld>
             <a:endParaRPr lang="en-US"/>
           </a:p>
@@ -3359,7 +3359,7 @@
             <a:fld id="{F2C92734-91F3-4440-93F3-9AC1E7002740}" type="datetime1">
               <a:rPr lang="en-US" smtClean="0"/>
               <a:pPr/>
-              <a:t>6/21/2026</a:t>
+              <a:t>6/22/2026</a:t>
             </a:fld>
             <a:endParaRPr lang="en-US"/>
           </a:p>
@@ -3754,7 +3754,7 @@
             <a:fld id="{AFB364C2-CFEF-4FAD-A8E6-3E74B80DE2EF}" type="datetime1">
               <a:rPr lang="en-US" smtClean="0"/>
               <a:pPr/>
-              <a:t>6/21/2026</a:t>
+              <a:t>6/22/2026</a:t>
             </a:fld>
             <a:endParaRPr lang="en-US"/>
           </a:p>
@@ -4063,7 +4063,7 @@
             <a:fld id="{71DBFAED-D7CA-4D7C-A019-B8282F53EEDF}" type="datetime1">
               <a:rPr lang="en-US" smtClean="0"/>
               <a:pPr/>
-              <a:t>6/21/2026</a:t>
+              <a:t>6/22/2026</a:t>
             </a:fld>
             <a:endParaRPr lang="en-US"/>
           </a:p>
@@ -4328,7 +4328,7 @@
             <a:fld id="{07481C06-B5EC-49F3-A717-B55AB6EFF92B}" type="datetime1">
               <a:rPr lang="en-US" smtClean="0"/>
               <a:pPr/>
-              <a:t>6/21/2026</a:t>
+              <a:t>6/22/2026</a:t>
             </a:fld>
             <a:endParaRPr lang="en-US"/>
           </a:p>
@@ -5525,7 +5525,7 @@
             <a:fld id="{B63A4781-F310-40F8-9F7D-B40F8FCBB97D}" type="datetime1">
               <a:rPr lang="en-US" smtClean="0"/>
               <a:pPr/>
-              <a:t>6/21/2026</a:t>
+              <a:t>6/22/2026</a:t>
             </a:fld>
             <a:endParaRPr lang="en-US" dirty="0"/>
           </a:p>
@@ -5733,7 +5733,7 @@
             <a:fld id="{2218C6FB-87CD-49EA-A0B8-02F3807F2FF4}" type="datetime1">
               <a:rPr lang="en-US" smtClean="0"/>
               <a:pPr/>
-              <a:t>6/21/2026</a:t>
+              <a:t>6/22/2026</a:t>
             </a:fld>
             <a:endParaRPr lang="en-US" dirty="0"/>
           </a:p>
@@ -6024,7 +6024,7 @@
             <a:fld id="{B62DE450-3731-4FAA-B1A4-262C0CF065F4}" type="datetime1">
               <a:rPr lang="en-US" smtClean="0"/>
               <a:pPr/>
-              <a:t>6/21/2026</a:t>
+              <a:t>6/22/2026</a:t>
             </a:fld>
             <a:endParaRPr lang="en-US"/>
           </a:p>
@@ -6186,7 +6186,7 @@
             <a:fld id="{8D12EC46-F5D3-4572-AED1-9CCC8CB80B60}" type="datetime1">
               <a:rPr lang="en-US" smtClean="0"/>
               <a:pPr/>
-              <a:t>6/21/2026</a:t>
+              <a:t>6/22/2026</a:t>
             </a:fld>
             <a:endParaRPr lang="en-US" dirty="0"/>
           </a:p>
@@ -6408,8 +6408,8 @@
         </p:nvSpPr>
         <p:spPr>
           <a:xfrm>
-            <a:off x="1361644" y="1866571"/>
-            <a:ext cx="2160240" cy="1728192"/>
+            <a:off x="1064168" y="1704999"/>
+            <a:ext cx="2634292" cy="2178208"/>
           </a:xfrm>
           <a:prstGeom prst="rect">
             <a:avLst/>
@@ -6452,12 +6452,20 @@
         </p:nvSpPr>
         <p:spPr>
           <a:xfrm>
-            <a:off x="1043694" y="1866571"/>
-            <a:ext cx="288032" cy="1728192"/>
+            <a:off x="746218" y="1705784"/>
+            <a:ext cx="288032" cy="2177423"/>
           </a:xfrm>
           <a:prstGeom prst="leftBrace">
             <a:avLst/>
           </a:prstGeom>
+          <a:ln>
+            <a:solidFill>
+              <a:schemeClr val="tx1">
+                <a:lumMod val="50000"/>
+                <a:lumOff val="50000"/>
+              </a:schemeClr>
+            </a:solidFill>
+          </a:ln>
         </p:spPr>
         <p:style>
           <a:lnRef idx="1">
@@ -6496,12 +6504,20 @@
         </p:nvSpPr>
         <p:spPr>
           <a:xfrm rot="16200000">
-            <a:off x="2297750" y="2693629"/>
-            <a:ext cx="288032" cy="2160242"/>
+            <a:off x="2237300" y="2745047"/>
+            <a:ext cx="288032" cy="2634293"/>
           </a:xfrm>
           <a:prstGeom prst="leftBrace">
             <a:avLst/>
           </a:prstGeom>
+          <a:ln>
+            <a:solidFill>
+              <a:schemeClr val="tx1">
+                <a:lumMod val="50000"/>
+                <a:lumOff val="50000"/>
+              </a:schemeClr>
+            </a:solidFill>
+          </a:ln>
         </p:spPr>
         <p:style>
           <a:lnRef idx="1">
@@ -6540,11 +6556,17 @@
         </p:nvGrpSpPr>
         <p:grpSpPr>
           <a:xfrm>
-            <a:off x="1428627" y="1938579"/>
+            <a:off x="1131151" y="2227023"/>
             <a:ext cx="2031168" cy="144000"/>
             <a:chOff x="1498832" y="1633364"/>
             <a:chExt cx="2031168" cy="144000"/>
           </a:xfrm>
+          <a:solidFill>
+            <a:schemeClr val="accent6">
+              <a:lumMod val="40000"/>
+              <a:lumOff val="60000"/>
+            </a:schemeClr>
+          </a:solidFill>
         </p:grpSpPr>
         <p:sp>
           <p:nvSpPr>
@@ -6566,6 +6588,7 @@
             <a:prstGeom prst="rect">
               <a:avLst/>
             </a:prstGeom>
+            <a:grpFill/>
           </p:spPr>
           <p:style>
             <a:lnRef idx="1">
@@ -6610,6 +6633,7 @@
             <a:prstGeom prst="rect">
               <a:avLst/>
             </a:prstGeom>
+            <a:grpFill/>
           </p:spPr>
           <p:style>
             <a:lnRef idx="1">
@@ -6654,6 +6678,7 @@
             <a:prstGeom prst="rect">
               <a:avLst/>
             </a:prstGeom>
+            <a:grpFill/>
           </p:spPr>
           <p:style>
             <a:lnRef idx="1">
@@ -6698,6 +6723,7 @@
             <a:prstGeom prst="rect">
               <a:avLst/>
             </a:prstGeom>
+            <a:grpFill/>
           </p:spPr>
           <p:style>
             <a:lnRef idx="1">
@@ -6742,6 +6768,7 @@
             <a:prstGeom prst="rect">
               <a:avLst/>
             </a:prstGeom>
+            <a:grpFill/>
           </p:spPr>
           <p:style>
             <a:lnRef idx="1">
@@ -6786,6 +6813,7 @@
             <a:prstGeom prst="rect">
               <a:avLst/>
             </a:prstGeom>
+            <a:grpFill/>
           </p:spPr>
           <p:style>
             <a:lnRef idx="1">
@@ -6830,6 +6858,7 @@
             <a:prstGeom prst="rect">
               <a:avLst/>
             </a:prstGeom>
+            <a:grpFill/>
           </p:spPr>
           <p:style>
             <a:lnRef idx="1">
@@ -6874,6 +6903,7 @@
             <a:prstGeom prst="rect">
               <a:avLst/>
             </a:prstGeom>
+            <a:grpFill/>
           </p:spPr>
           <p:style>
             <a:lnRef idx="1">
@@ -6913,7 +6943,7 @@
         </p:nvGrpSpPr>
         <p:grpSpPr>
           <a:xfrm>
-            <a:off x="1428627" y="2143980"/>
+            <a:off x="1131151" y="2432424"/>
             <a:ext cx="2031168" cy="144940"/>
             <a:chOff x="1498832" y="1838765"/>
             <a:chExt cx="2031168" cy="144940"/>
@@ -7286,7 +7316,7 @@
         </p:nvGrpSpPr>
         <p:grpSpPr>
           <a:xfrm>
-            <a:off x="1428627" y="2349381"/>
+            <a:off x="1131151" y="2637825"/>
             <a:ext cx="2031168" cy="145880"/>
             <a:chOff x="1498832" y="2044166"/>
             <a:chExt cx="2031168" cy="145880"/>
@@ -7659,7 +7689,7 @@
         </p:nvGrpSpPr>
         <p:grpSpPr>
           <a:xfrm>
-            <a:off x="1428627" y="2554782"/>
+            <a:off x="1131151" y="2843226"/>
             <a:ext cx="2031168" cy="146820"/>
             <a:chOff x="1498832" y="2249567"/>
             <a:chExt cx="2031168" cy="146820"/>
@@ -8032,7 +8062,7 @@
         </p:nvGrpSpPr>
         <p:grpSpPr>
           <a:xfrm>
-            <a:off x="1428627" y="2760183"/>
+            <a:off x="1131151" y="3048627"/>
             <a:ext cx="2031168" cy="147760"/>
             <a:chOff x="1498832" y="2454968"/>
             <a:chExt cx="2031168" cy="147760"/>
@@ -8405,7 +8435,7 @@
         </p:nvGrpSpPr>
         <p:grpSpPr>
           <a:xfrm>
-            <a:off x="1428627" y="2965584"/>
+            <a:off x="1131151" y="3254028"/>
             <a:ext cx="2031168" cy="148700"/>
             <a:chOff x="1498832" y="2660369"/>
             <a:chExt cx="2031168" cy="148700"/>
@@ -8778,7 +8808,7 @@
         </p:nvGrpSpPr>
         <p:grpSpPr>
           <a:xfrm>
-            <a:off x="1428627" y="3170985"/>
+            <a:off x="1131151" y="3459429"/>
             <a:ext cx="2032535" cy="149640"/>
             <a:chOff x="1498832" y="2865770"/>
             <a:chExt cx="2032535" cy="149640"/>
@@ -9151,7 +9181,7 @@
         </p:nvGrpSpPr>
         <p:grpSpPr>
           <a:xfrm>
-            <a:off x="1428627" y="3376386"/>
+            <a:off x="1131151" y="3664830"/>
             <a:ext cx="2027511" cy="150577"/>
             <a:chOff x="1498832" y="3071171"/>
             <a:chExt cx="2027511" cy="150577"/>
@@ -9528,8 +9558,8 @@
         </p:nvSpPr>
         <p:spPr>
           <a:xfrm rot="5400000">
-            <a:off x="544117" y="2561390"/>
-            <a:ext cx="747962" cy="338554"/>
+            <a:off x="107644" y="2624826"/>
+            <a:ext cx="989117" cy="338554"/>
           </a:xfrm>
           <a:prstGeom prst="rect">
             <a:avLst/>
@@ -9544,7 +9574,7 @@
           <a:p>
             <a:r>
               <a:rPr lang="en-IN" dirty="0"/>
-              <a:t>x8 row</a:t>
+              <a:t>Row LEDs</a:t>
             </a:r>
           </a:p>
         </p:txBody>
@@ -9563,8 +9593,8 @@
         </p:nvSpPr>
         <p:spPr>
           <a:xfrm>
-            <a:off x="1919930" y="3865405"/>
-            <a:ext cx="1042145" cy="338554"/>
+            <a:off x="1745665" y="4171421"/>
+            <a:ext cx="1268296" cy="338554"/>
           </a:xfrm>
           <a:prstGeom prst="rect">
             <a:avLst/>
@@ -9579,7 +9609,7 @@
           <a:p>
             <a:r>
               <a:rPr lang="en-IN" dirty="0"/>
-              <a:t>x8 column</a:t>
+              <a:t>Column LEDs</a:t>
             </a:r>
           </a:p>
         </p:txBody>
@@ -9598,7 +9628,7 @@
         </p:nvSpPr>
         <p:spPr>
           <a:xfrm>
-            <a:off x="1455330" y="1546294"/>
+            <a:off x="1305881" y="1370263"/>
             <a:ext cx="1971343" cy="338554"/>
           </a:xfrm>
           <a:prstGeom prst="rect">
@@ -9763,7 +9793,7 @@
         </p:nvSpPr>
         <p:spPr>
           <a:xfrm>
-            <a:off x="6450204" y="2539228"/>
+            <a:off x="6444485" y="3098535"/>
             <a:ext cx="504056" cy="373981"/>
           </a:xfrm>
           <a:prstGeom prst="rect">
@@ -9850,14 +9880,7 @@
             <a:pPr algn="ctr"/>
             <a:r>
               <a:rPr lang="en-IN" sz="1100" dirty="0"/>
-              <a:t>LP</a:t>
-            </a:r>
-          </a:p>
-          <a:p>
-            <a:pPr algn="ctr"/>
-            <a:r>
-              <a:rPr lang="en-IN" sz="1100" dirty="0"/>
-              <a:t>MCU</a:t>
+              <a:t>RTC</a:t>
             </a:r>
           </a:p>
         </p:txBody>
@@ -9906,7 +9929,14 @@
             <a:pPr algn="ctr"/>
             <a:r>
               <a:rPr lang="en-IN" sz="1100" dirty="0"/>
-              <a:t>RTC</a:t>
+              <a:t>LP</a:t>
+            </a:r>
+          </a:p>
+          <a:p>
+            <a:pPr algn="ctr"/>
+            <a:r>
+              <a:rPr lang="en-IN" sz="1100" dirty="0"/>
+              <a:t>MCU</a:t>
             </a:r>
           </a:p>
         </p:txBody>
@@ -9955,7 +9985,7 @@
             <a:pPr algn="ctr"/>
             <a:r>
               <a:rPr lang="en-IN" sz="1100" dirty="0"/>
-              <a:t>ENV </a:t>
+              <a:t>TH</a:t>
             </a:r>
           </a:p>
           <a:p>
@@ -10068,7 +10098,7 @@
             <a:pPr algn="ctr"/>
             <a:r>
               <a:rPr lang="en-IN" sz="1100" dirty="0"/>
-              <a:t>PUSH</a:t>
+              <a:t>LED,</a:t>
             </a:r>
           </a:p>
           <a:p>
@@ -10136,8 +10166,8 @@
         </p:nvSpPr>
         <p:spPr>
           <a:xfrm>
-            <a:off x="5635431" y="3734599"/>
-            <a:ext cx="2133600" cy="938719"/>
+            <a:off x="4687889" y="3812475"/>
+            <a:ext cx="2133600" cy="1277273"/>
           </a:xfrm>
           <a:prstGeom prst="rect">
             <a:avLst/>
@@ -10170,7 +10200,7 @@
           <a:p>
             <a:r>
               <a:rPr lang="en-IN" sz="1100" dirty="0"/>
-              <a:t>ENV SNS: Environmental Sensor</a:t>
+              <a:t>TH SNS: Temperature Sensor</a:t>
             </a:r>
           </a:p>
           <a:p>
@@ -10178,6 +10208,1160 @@
               <a:rPr lang="en-IN" sz="1100" dirty="0"/>
               <a:t>LP PMIC: Low Power PMIC</a:t>
             </a:r>
+          </a:p>
+          <a:p>
+            <a:r>
+              <a:rPr lang="en-IN" sz="1100" dirty="0"/>
+              <a:t>XTAL: External Crystal</a:t>
+            </a:r>
+          </a:p>
+          <a:p>
+            <a:r>
+              <a:rPr lang="en-IN" sz="1100" dirty="0"/>
+              <a:t>USBC: USB-C Connector</a:t>
+            </a:r>
+          </a:p>
+        </p:txBody>
+      </p:sp>
+      <p:cxnSp>
+        <p:nvCxnSpPr>
+          <p:cNvPr id="6" name="Straight Connector 5">
+            <a:extLst>
+              <a:ext uri="{FF2B5EF4-FFF2-40B4-BE49-F238E27FC236}">
+                <a16:creationId xmlns:a16="http://schemas.microsoft.com/office/drawing/2014/main" id="{E91D89BB-4094-9901-9DBA-2415DA4BCE87}"/>
+              </a:ext>
+            </a:extLst>
+          </p:cNvPr>
+          <p:cNvCxnSpPr/>
+          <p:nvPr/>
+        </p:nvCxnSpPr>
+        <p:spPr>
+          <a:xfrm>
+            <a:off x="3234662" y="3733913"/>
+            <a:ext cx="432048" cy="0"/>
+          </a:xfrm>
+          <a:prstGeom prst="line">
+            <a:avLst/>
+          </a:prstGeom>
+          <a:ln w="19050">
+            <a:solidFill>
+              <a:schemeClr val="tx1">
+                <a:lumMod val="50000"/>
+                <a:lumOff val="50000"/>
+              </a:schemeClr>
+            </a:solidFill>
+            <a:prstDash val="sysDot"/>
+          </a:ln>
+        </p:spPr>
+        <p:style>
+          <a:lnRef idx="2">
+            <a:schemeClr val="accent6"/>
+          </a:lnRef>
+          <a:fillRef idx="0">
+            <a:schemeClr val="accent6"/>
+          </a:fillRef>
+          <a:effectRef idx="1">
+            <a:schemeClr val="accent6"/>
+          </a:effectRef>
+          <a:fontRef idx="minor">
+            <a:schemeClr val="tx1"/>
+          </a:fontRef>
+        </p:style>
+      </p:cxnSp>
+      <p:cxnSp>
+        <p:nvCxnSpPr>
+          <p:cNvPr id="7" name="Straight Connector 6">
+            <a:extLst>
+              <a:ext uri="{FF2B5EF4-FFF2-40B4-BE49-F238E27FC236}">
+                <a16:creationId xmlns:a16="http://schemas.microsoft.com/office/drawing/2014/main" id="{623EB44B-E408-AFFC-0594-DC346793C7AB}"/>
+              </a:ext>
+            </a:extLst>
+          </p:cNvPr>
+          <p:cNvCxnSpPr/>
+          <p:nvPr/>
+        </p:nvCxnSpPr>
+        <p:spPr>
+          <a:xfrm>
+            <a:off x="3234662" y="3525032"/>
+            <a:ext cx="432048" cy="0"/>
+          </a:xfrm>
+          <a:prstGeom prst="line">
+            <a:avLst/>
+          </a:prstGeom>
+          <a:ln w="19050">
+            <a:solidFill>
+              <a:schemeClr val="tx1">
+                <a:lumMod val="50000"/>
+                <a:lumOff val="50000"/>
+              </a:schemeClr>
+            </a:solidFill>
+            <a:prstDash val="sysDot"/>
+          </a:ln>
+        </p:spPr>
+        <p:style>
+          <a:lnRef idx="2">
+            <a:schemeClr val="accent6"/>
+          </a:lnRef>
+          <a:fillRef idx="0">
+            <a:schemeClr val="accent6"/>
+          </a:fillRef>
+          <a:effectRef idx="1">
+            <a:schemeClr val="accent6"/>
+          </a:effectRef>
+          <a:fontRef idx="minor">
+            <a:schemeClr val="tx1"/>
+          </a:fontRef>
+        </p:style>
+      </p:cxnSp>
+      <p:cxnSp>
+        <p:nvCxnSpPr>
+          <p:cNvPr id="8" name="Straight Connector 7">
+            <a:extLst>
+              <a:ext uri="{FF2B5EF4-FFF2-40B4-BE49-F238E27FC236}">
+                <a16:creationId xmlns:a16="http://schemas.microsoft.com/office/drawing/2014/main" id="{7B67849F-609A-F908-BF63-46C73F7F64EB}"/>
+              </a:ext>
+            </a:extLst>
+          </p:cNvPr>
+          <p:cNvCxnSpPr/>
+          <p:nvPr/>
+        </p:nvCxnSpPr>
+        <p:spPr>
+          <a:xfrm>
+            <a:off x="3234662" y="3318949"/>
+            <a:ext cx="432048" cy="0"/>
+          </a:xfrm>
+          <a:prstGeom prst="line">
+            <a:avLst/>
+          </a:prstGeom>
+          <a:ln w="19050">
+            <a:solidFill>
+              <a:schemeClr val="tx1">
+                <a:lumMod val="50000"/>
+                <a:lumOff val="50000"/>
+              </a:schemeClr>
+            </a:solidFill>
+            <a:prstDash val="sysDot"/>
+          </a:ln>
+        </p:spPr>
+        <p:style>
+          <a:lnRef idx="2">
+            <a:schemeClr val="accent6"/>
+          </a:lnRef>
+          <a:fillRef idx="0">
+            <a:schemeClr val="accent6"/>
+          </a:fillRef>
+          <a:effectRef idx="1">
+            <a:schemeClr val="accent6"/>
+          </a:effectRef>
+          <a:fontRef idx="minor">
+            <a:schemeClr val="tx1"/>
+          </a:fontRef>
+        </p:style>
+      </p:cxnSp>
+      <p:cxnSp>
+        <p:nvCxnSpPr>
+          <p:cNvPr id="9" name="Straight Connector 8">
+            <a:extLst>
+              <a:ext uri="{FF2B5EF4-FFF2-40B4-BE49-F238E27FC236}">
+                <a16:creationId xmlns:a16="http://schemas.microsoft.com/office/drawing/2014/main" id="{BF4C0F45-E861-32B7-1D82-7A1A04C2F384}"/>
+              </a:ext>
+            </a:extLst>
+          </p:cNvPr>
+          <p:cNvCxnSpPr/>
+          <p:nvPr/>
+        </p:nvCxnSpPr>
+        <p:spPr>
+          <a:xfrm>
+            <a:off x="3234662" y="3110275"/>
+            <a:ext cx="432048" cy="0"/>
+          </a:xfrm>
+          <a:prstGeom prst="line">
+            <a:avLst/>
+          </a:prstGeom>
+          <a:ln w="19050">
+            <a:solidFill>
+              <a:schemeClr val="tx1">
+                <a:lumMod val="50000"/>
+                <a:lumOff val="50000"/>
+              </a:schemeClr>
+            </a:solidFill>
+            <a:prstDash val="sysDot"/>
+          </a:ln>
+        </p:spPr>
+        <p:style>
+          <a:lnRef idx="2">
+            <a:schemeClr val="accent6"/>
+          </a:lnRef>
+          <a:fillRef idx="0">
+            <a:schemeClr val="accent6"/>
+          </a:fillRef>
+          <a:effectRef idx="1">
+            <a:schemeClr val="accent6"/>
+          </a:effectRef>
+          <a:fontRef idx="minor">
+            <a:schemeClr val="tx1"/>
+          </a:fontRef>
+        </p:style>
+      </p:cxnSp>
+      <p:cxnSp>
+        <p:nvCxnSpPr>
+          <p:cNvPr id="10" name="Straight Connector 9">
+            <a:extLst>
+              <a:ext uri="{FF2B5EF4-FFF2-40B4-BE49-F238E27FC236}">
+                <a16:creationId xmlns:a16="http://schemas.microsoft.com/office/drawing/2014/main" id="{7484ACAA-8522-BF2B-372B-54DBA65580BC}"/>
+              </a:ext>
+            </a:extLst>
+          </p:cNvPr>
+          <p:cNvCxnSpPr/>
+          <p:nvPr/>
+        </p:nvCxnSpPr>
+        <p:spPr>
+          <a:xfrm>
+            <a:off x="3234662" y="2913510"/>
+            <a:ext cx="432048" cy="0"/>
+          </a:xfrm>
+          <a:prstGeom prst="line">
+            <a:avLst/>
+          </a:prstGeom>
+          <a:ln w="19050">
+            <a:solidFill>
+              <a:schemeClr val="tx1">
+                <a:lumMod val="50000"/>
+                <a:lumOff val="50000"/>
+              </a:schemeClr>
+            </a:solidFill>
+            <a:prstDash val="sysDot"/>
+          </a:ln>
+        </p:spPr>
+        <p:style>
+          <a:lnRef idx="2">
+            <a:schemeClr val="accent6"/>
+          </a:lnRef>
+          <a:fillRef idx="0">
+            <a:schemeClr val="accent6"/>
+          </a:fillRef>
+          <a:effectRef idx="1">
+            <a:schemeClr val="accent6"/>
+          </a:effectRef>
+          <a:fontRef idx="minor">
+            <a:schemeClr val="tx1"/>
+          </a:fontRef>
+        </p:style>
+      </p:cxnSp>
+      <p:cxnSp>
+        <p:nvCxnSpPr>
+          <p:cNvPr id="13" name="Straight Connector 12">
+            <a:extLst>
+              <a:ext uri="{FF2B5EF4-FFF2-40B4-BE49-F238E27FC236}">
+                <a16:creationId xmlns:a16="http://schemas.microsoft.com/office/drawing/2014/main" id="{60FC494C-736A-7463-B1DD-94402BFCAF73}"/>
+              </a:ext>
+            </a:extLst>
+          </p:cNvPr>
+          <p:cNvCxnSpPr/>
+          <p:nvPr/>
+        </p:nvCxnSpPr>
+        <p:spPr>
+          <a:xfrm>
+            <a:off x="3234662" y="2704833"/>
+            <a:ext cx="432048" cy="0"/>
+          </a:xfrm>
+          <a:prstGeom prst="line">
+            <a:avLst/>
+          </a:prstGeom>
+          <a:ln w="19050">
+            <a:solidFill>
+              <a:schemeClr val="tx1">
+                <a:lumMod val="50000"/>
+                <a:lumOff val="50000"/>
+              </a:schemeClr>
+            </a:solidFill>
+            <a:prstDash val="sysDot"/>
+          </a:ln>
+        </p:spPr>
+        <p:style>
+          <a:lnRef idx="2">
+            <a:schemeClr val="accent6"/>
+          </a:lnRef>
+          <a:fillRef idx="0">
+            <a:schemeClr val="accent6"/>
+          </a:fillRef>
+          <a:effectRef idx="1">
+            <a:schemeClr val="accent6"/>
+          </a:effectRef>
+          <a:fontRef idx="minor">
+            <a:schemeClr val="tx1"/>
+          </a:fontRef>
+        </p:style>
+      </p:cxnSp>
+      <p:cxnSp>
+        <p:nvCxnSpPr>
+          <p:cNvPr id="14" name="Straight Connector 13">
+            <a:extLst>
+              <a:ext uri="{FF2B5EF4-FFF2-40B4-BE49-F238E27FC236}">
+                <a16:creationId xmlns:a16="http://schemas.microsoft.com/office/drawing/2014/main" id="{F09AA34B-A4CE-5EE9-BA7F-FAD963DB54DE}"/>
+              </a:ext>
+            </a:extLst>
+          </p:cNvPr>
+          <p:cNvCxnSpPr/>
+          <p:nvPr/>
+        </p:nvCxnSpPr>
+        <p:spPr>
+          <a:xfrm>
+            <a:off x="3234662" y="2281848"/>
+            <a:ext cx="432048" cy="0"/>
+          </a:xfrm>
+          <a:prstGeom prst="line">
+            <a:avLst/>
+          </a:prstGeom>
+          <a:ln w="19050">
+            <a:solidFill>
+              <a:schemeClr val="tx1">
+                <a:lumMod val="50000"/>
+                <a:lumOff val="50000"/>
+              </a:schemeClr>
+            </a:solidFill>
+            <a:prstDash val="sysDot"/>
+          </a:ln>
+        </p:spPr>
+        <p:style>
+          <a:lnRef idx="2">
+            <a:schemeClr val="accent6"/>
+          </a:lnRef>
+          <a:fillRef idx="0">
+            <a:schemeClr val="accent6"/>
+          </a:fillRef>
+          <a:effectRef idx="1">
+            <a:schemeClr val="accent6"/>
+          </a:effectRef>
+          <a:fontRef idx="minor">
+            <a:schemeClr val="tx1"/>
+          </a:fontRef>
+        </p:style>
+      </p:cxnSp>
+      <p:cxnSp>
+        <p:nvCxnSpPr>
+          <p:cNvPr id="16" name="Straight Connector 15">
+            <a:extLst>
+              <a:ext uri="{FF2B5EF4-FFF2-40B4-BE49-F238E27FC236}">
+                <a16:creationId xmlns:a16="http://schemas.microsoft.com/office/drawing/2014/main" id="{31C76E80-B88C-A449-EFDB-1B238715B57E}"/>
+              </a:ext>
+            </a:extLst>
+          </p:cNvPr>
+          <p:cNvCxnSpPr/>
+          <p:nvPr/>
+        </p:nvCxnSpPr>
+        <p:spPr>
+          <a:xfrm>
+            <a:off x="3234662" y="2497872"/>
+            <a:ext cx="432048" cy="0"/>
+          </a:xfrm>
+          <a:prstGeom prst="line">
+            <a:avLst/>
+          </a:prstGeom>
+          <a:ln w="19050">
+            <a:solidFill>
+              <a:schemeClr val="tx1">
+                <a:lumMod val="50000"/>
+                <a:lumOff val="50000"/>
+              </a:schemeClr>
+            </a:solidFill>
+            <a:prstDash val="sysDot"/>
+          </a:ln>
+        </p:spPr>
+        <p:style>
+          <a:lnRef idx="2">
+            <a:schemeClr val="accent6"/>
+          </a:lnRef>
+          <a:fillRef idx="0">
+            <a:schemeClr val="accent6"/>
+          </a:fillRef>
+          <a:effectRef idx="1">
+            <a:schemeClr val="accent6"/>
+          </a:effectRef>
+          <a:fontRef idx="minor">
+            <a:schemeClr val="tx1"/>
+          </a:fontRef>
+        </p:style>
+      </p:cxnSp>
+      <p:cxnSp>
+        <p:nvCxnSpPr>
+          <p:cNvPr id="17" name="Straight Connector 16">
+            <a:extLst>
+              <a:ext uri="{FF2B5EF4-FFF2-40B4-BE49-F238E27FC236}">
+                <a16:creationId xmlns:a16="http://schemas.microsoft.com/office/drawing/2014/main" id="{BA612FC0-28A6-D55B-BA0A-83988723A948}"/>
+              </a:ext>
+            </a:extLst>
+          </p:cNvPr>
+          <p:cNvCxnSpPr/>
+          <p:nvPr/>
+        </p:nvCxnSpPr>
+        <p:spPr>
+          <a:xfrm rot="16200000" flipV="1">
+            <a:off x="991721" y="1950384"/>
+            <a:ext cx="432048" cy="0"/>
+          </a:xfrm>
+          <a:prstGeom prst="line">
+            <a:avLst/>
+          </a:prstGeom>
+          <a:ln w="19050">
+            <a:solidFill>
+              <a:schemeClr val="tx1">
+                <a:lumMod val="50000"/>
+                <a:lumOff val="50000"/>
+              </a:schemeClr>
+            </a:solidFill>
+            <a:prstDash val="sysDot"/>
+          </a:ln>
+        </p:spPr>
+        <p:style>
+          <a:lnRef idx="2">
+            <a:schemeClr val="accent6"/>
+          </a:lnRef>
+          <a:fillRef idx="0">
+            <a:schemeClr val="accent6"/>
+          </a:fillRef>
+          <a:effectRef idx="1">
+            <a:schemeClr val="accent6"/>
+          </a:effectRef>
+          <a:fontRef idx="minor">
+            <a:schemeClr val="tx1"/>
+          </a:fontRef>
+        </p:style>
+      </p:cxnSp>
+      <p:cxnSp>
+        <p:nvCxnSpPr>
+          <p:cNvPr id="18" name="Straight Connector 17">
+            <a:extLst>
+              <a:ext uri="{FF2B5EF4-FFF2-40B4-BE49-F238E27FC236}">
+                <a16:creationId xmlns:a16="http://schemas.microsoft.com/office/drawing/2014/main" id="{EC871DE3-079C-79BB-610F-0F627D2B02DC}"/>
+              </a:ext>
+            </a:extLst>
+          </p:cNvPr>
+          <p:cNvCxnSpPr/>
+          <p:nvPr/>
+        </p:nvCxnSpPr>
+        <p:spPr>
+          <a:xfrm rot="16200000" flipV="1">
+            <a:off x="1267667" y="1950384"/>
+            <a:ext cx="432048" cy="0"/>
+          </a:xfrm>
+          <a:prstGeom prst="line">
+            <a:avLst/>
+          </a:prstGeom>
+          <a:ln w="19050">
+            <a:solidFill>
+              <a:schemeClr val="tx1">
+                <a:lumMod val="50000"/>
+                <a:lumOff val="50000"/>
+              </a:schemeClr>
+            </a:solidFill>
+            <a:prstDash val="sysDot"/>
+          </a:ln>
+        </p:spPr>
+        <p:style>
+          <a:lnRef idx="2">
+            <a:schemeClr val="accent6"/>
+          </a:lnRef>
+          <a:fillRef idx="0">
+            <a:schemeClr val="accent6"/>
+          </a:fillRef>
+          <a:effectRef idx="1">
+            <a:schemeClr val="accent6"/>
+          </a:effectRef>
+          <a:fontRef idx="minor">
+            <a:schemeClr val="tx1"/>
+          </a:fontRef>
+        </p:style>
+      </p:cxnSp>
+      <p:cxnSp>
+        <p:nvCxnSpPr>
+          <p:cNvPr id="19" name="Straight Connector 18">
+            <a:extLst>
+              <a:ext uri="{FF2B5EF4-FFF2-40B4-BE49-F238E27FC236}">
+                <a16:creationId xmlns:a16="http://schemas.microsoft.com/office/drawing/2014/main" id="{E8DEDF2C-1F13-C5A4-AE2C-72DC355F05D2}"/>
+              </a:ext>
+            </a:extLst>
+          </p:cNvPr>
+          <p:cNvCxnSpPr/>
+          <p:nvPr/>
+        </p:nvCxnSpPr>
+        <p:spPr>
+          <a:xfrm rot="16200000" flipV="1">
+            <a:off x="1539916" y="1950384"/>
+            <a:ext cx="432048" cy="0"/>
+          </a:xfrm>
+          <a:prstGeom prst="line">
+            <a:avLst/>
+          </a:prstGeom>
+          <a:ln w="19050">
+            <a:solidFill>
+              <a:schemeClr val="tx1">
+                <a:lumMod val="50000"/>
+                <a:lumOff val="50000"/>
+              </a:schemeClr>
+            </a:solidFill>
+            <a:prstDash val="sysDot"/>
+          </a:ln>
+        </p:spPr>
+        <p:style>
+          <a:lnRef idx="2">
+            <a:schemeClr val="accent6"/>
+          </a:lnRef>
+          <a:fillRef idx="0">
+            <a:schemeClr val="accent6"/>
+          </a:fillRef>
+          <a:effectRef idx="1">
+            <a:schemeClr val="accent6"/>
+          </a:effectRef>
+          <a:fontRef idx="minor">
+            <a:schemeClr val="tx1"/>
+          </a:fontRef>
+        </p:style>
+      </p:cxnSp>
+      <p:cxnSp>
+        <p:nvCxnSpPr>
+          <p:cNvPr id="20" name="Straight Connector 19">
+            <a:extLst>
+              <a:ext uri="{FF2B5EF4-FFF2-40B4-BE49-F238E27FC236}">
+                <a16:creationId xmlns:a16="http://schemas.microsoft.com/office/drawing/2014/main" id="{C41DF82B-882F-1ADD-7BDD-E222AB3136EF}"/>
+              </a:ext>
+            </a:extLst>
+          </p:cNvPr>
+          <p:cNvCxnSpPr/>
+          <p:nvPr/>
+        </p:nvCxnSpPr>
+        <p:spPr>
+          <a:xfrm rot="16200000" flipV="1">
+            <a:off x="1802889" y="1950384"/>
+            <a:ext cx="432048" cy="0"/>
+          </a:xfrm>
+          <a:prstGeom prst="line">
+            <a:avLst/>
+          </a:prstGeom>
+          <a:ln w="19050">
+            <a:solidFill>
+              <a:schemeClr val="tx1">
+                <a:lumMod val="50000"/>
+                <a:lumOff val="50000"/>
+              </a:schemeClr>
+            </a:solidFill>
+            <a:prstDash val="sysDot"/>
+          </a:ln>
+        </p:spPr>
+        <p:style>
+          <a:lnRef idx="2">
+            <a:schemeClr val="accent6"/>
+          </a:lnRef>
+          <a:fillRef idx="0">
+            <a:schemeClr val="accent6"/>
+          </a:fillRef>
+          <a:effectRef idx="1">
+            <a:schemeClr val="accent6"/>
+          </a:effectRef>
+          <a:fontRef idx="minor">
+            <a:schemeClr val="tx1"/>
+          </a:fontRef>
+        </p:style>
+      </p:cxnSp>
+      <p:cxnSp>
+        <p:nvCxnSpPr>
+          <p:cNvPr id="21" name="Straight Connector 20">
+            <a:extLst>
+              <a:ext uri="{FF2B5EF4-FFF2-40B4-BE49-F238E27FC236}">
+                <a16:creationId xmlns:a16="http://schemas.microsoft.com/office/drawing/2014/main" id="{70E934EC-3459-56BF-3BB8-AEA3C6AF5345}"/>
+              </a:ext>
+            </a:extLst>
+          </p:cNvPr>
+          <p:cNvCxnSpPr/>
+          <p:nvPr/>
+        </p:nvCxnSpPr>
+        <p:spPr>
+          <a:xfrm rot="16200000" flipV="1">
+            <a:off x="2075529" y="1950384"/>
+            <a:ext cx="432048" cy="0"/>
+          </a:xfrm>
+          <a:prstGeom prst="line">
+            <a:avLst/>
+          </a:prstGeom>
+          <a:ln w="19050">
+            <a:solidFill>
+              <a:schemeClr val="tx1">
+                <a:lumMod val="50000"/>
+                <a:lumOff val="50000"/>
+              </a:schemeClr>
+            </a:solidFill>
+            <a:prstDash val="sysDot"/>
+          </a:ln>
+        </p:spPr>
+        <p:style>
+          <a:lnRef idx="2">
+            <a:schemeClr val="accent6"/>
+          </a:lnRef>
+          <a:fillRef idx="0">
+            <a:schemeClr val="accent6"/>
+          </a:fillRef>
+          <a:effectRef idx="1">
+            <a:schemeClr val="accent6"/>
+          </a:effectRef>
+          <a:fontRef idx="minor">
+            <a:schemeClr val="tx1"/>
+          </a:fontRef>
+        </p:style>
+      </p:cxnSp>
+      <p:cxnSp>
+        <p:nvCxnSpPr>
+          <p:cNvPr id="22" name="Straight Connector 21">
+            <a:extLst>
+              <a:ext uri="{FF2B5EF4-FFF2-40B4-BE49-F238E27FC236}">
+                <a16:creationId xmlns:a16="http://schemas.microsoft.com/office/drawing/2014/main" id="{E90CA9E9-0B50-ED04-5840-D4477310D3AC}"/>
+              </a:ext>
+            </a:extLst>
+          </p:cNvPr>
+          <p:cNvCxnSpPr/>
+          <p:nvPr/>
+        </p:nvCxnSpPr>
+        <p:spPr>
+          <a:xfrm rot="16200000" flipV="1">
+            <a:off x="2341680" y="1950384"/>
+            <a:ext cx="432048" cy="0"/>
+          </a:xfrm>
+          <a:prstGeom prst="line">
+            <a:avLst/>
+          </a:prstGeom>
+          <a:ln w="19050">
+            <a:solidFill>
+              <a:schemeClr val="tx1">
+                <a:lumMod val="50000"/>
+                <a:lumOff val="50000"/>
+              </a:schemeClr>
+            </a:solidFill>
+            <a:prstDash val="sysDot"/>
+          </a:ln>
+        </p:spPr>
+        <p:style>
+          <a:lnRef idx="2">
+            <a:schemeClr val="accent6"/>
+          </a:lnRef>
+          <a:fillRef idx="0">
+            <a:schemeClr val="accent6"/>
+          </a:fillRef>
+          <a:effectRef idx="1">
+            <a:schemeClr val="accent6"/>
+          </a:effectRef>
+          <a:fontRef idx="minor">
+            <a:schemeClr val="tx1"/>
+          </a:fontRef>
+        </p:style>
+      </p:cxnSp>
+      <p:cxnSp>
+        <p:nvCxnSpPr>
+          <p:cNvPr id="23" name="Straight Connector 22">
+            <a:extLst>
+              <a:ext uri="{FF2B5EF4-FFF2-40B4-BE49-F238E27FC236}">
+                <a16:creationId xmlns:a16="http://schemas.microsoft.com/office/drawing/2014/main" id="{09C70EBB-F210-F88D-BF17-A3B95B7769C8}"/>
+              </a:ext>
+            </a:extLst>
+          </p:cNvPr>
+          <p:cNvCxnSpPr/>
+          <p:nvPr/>
+        </p:nvCxnSpPr>
+        <p:spPr>
+          <a:xfrm rot="16200000" flipV="1">
+            <a:off x="2874622" y="1950384"/>
+            <a:ext cx="432048" cy="0"/>
+          </a:xfrm>
+          <a:prstGeom prst="line">
+            <a:avLst/>
+          </a:prstGeom>
+          <a:ln w="19050">
+            <a:solidFill>
+              <a:schemeClr val="tx1">
+                <a:lumMod val="50000"/>
+                <a:lumOff val="50000"/>
+              </a:schemeClr>
+            </a:solidFill>
+            <a:prstDash val="sysDot"/>
+          </a:ln>
+        </p:spPr>
+        <p:style>
+          <a:lnRef idx="2">
+            <a:schemeClr val="accent6"/>
+          </a:lnRef>
+          <a:fillRef idx="0">
+            <a:schemeClr val="accent6"/>
+          </a:fillRef>
+          <a:effectRef idx="1">
+            <a:schemeClr val="accent6"/>
+          </a:effectRef>
+          <a:fontRef idx="minor">
+            <a:schemeClr val="tx1"/>
+          </a:fontRef>
+        </p:style>
+      </p:cxnSp>
+      <p:cxnSp>
+        <p:nvCxnSpPr>
+          <p:cNvPr id="24" name="Straight Connector 23">
+            <a:extLst>
+              <a:ext uri="{FF2B5EF4-FFF2-40B4-BE49-F238E27FC236}">
+                <a16:creationId xmlns:a16="http://schemas.microsoft.com/office/drawing/2014/main" id="{95E47C0A-AAD3-C8BB-5A66-0DF53B149A34}"/>
+              </a:ext>
+            </a:extLst>
+          </p:cNvPr>
+          <p:cNvCxnSpPr/>
+          <p:nvPr/>
+        </p:nvCxnSpPr>
+        <p:spPr>
+          <a:xfrm rot="16200000" flipV="1">
+            <a:off x="2602390" y="1950384"/>
+            <a:ext cx="432048" cy="0"/>
+          </a:xfrm>
+          <a:prstGeom prst="line">
+            <a:avLst/>
+          </a:prstGeom>
+          <a:ln w="19050">
+            <a:solidFill>
+              <a:schemeClr val="tx1">
+                <a:lumMod val="50000"/>
+                <a:lumOff val="50000"/>
+              </a:schemeClr>
+            </a:solidFill>
+            <a:prstDash val="sysDot"/>
+          </a:ln>
+        </p:spPr>
+        <p:style>
+          <a:lnRef idx="2">
+            <a:schemeClr val="accent6"/>
+          </a:lnRef>
+          <a:fillRef idx="0">
+            <a:schemeClr val="accent6"/>
+          </a:fillRef>
+          <a:effectRef idx="1">
+            <a:schemeClr val="accent6"/>
+          </a:effectRef>
+          <a:fontRef idx="minor">
+            <a:schemeClr val="tx1"/>
+          </a:fontRef>
+        </p:style>
+      </p:cxnSp>
+      <p:sp>
+        <p:nvSpPr>
+          <p:cNvPr id="29" name="Rectangle 28">
+            <a:extLst>
+              <a:ext uri="{FF2B5EF4-FFF2-40B4-BE49-F238E27FC236}">
+                <a16:creationId xmlns:a16="http://schemas.microsoft.com/office/drawing/2014/main" id="{2BCBC088-E6CB-784A-D346-6C8301640A94}"/>
+              </a:ext>
+            </a:extLst>
+          </p:cNvPr>
+          <p:cNvSpPr/>
+          <p:nvPr/>
+        </p:nvSpPr>
+        <p:spPr>
+          <a:xfrm>
+            <a:off x="6444485" y="2538214"/>
+            <a:ext cx="504056" cy="373981"/>
+          </a:xfrm>
+          <a:prstGeom prst="rect">
+            <a:avLst/>
+          </a:prstGeom>
+        </p:spPr>
+        <p:style>
+          <a:lnRef idx="2">
+            <a:schemeClr val="accent1">
+              <a:shade val="15000"/>
+            </a:schemeClr>
+          </a:lnRef>
+          <a:fillRef idx="1">
+            <a:schemeClr val="accent1"/>
+          </a:fillRef>
+          <a:effectRef idx="0">
+            <a:schemeClr val="accent1"/>
+          </a:effectRef>
+          <a:fontRef idx="minor">
+            <a:schemeClr val="lt1"/>
+          </a:fontRef>
+        </p:style>
+        <p:txBody>
+          <a:bodyPr rtlCol="0" anchor="ctr"/>
+          <a:lstStyle/>
+          <a:p>
+            <a:pPr algn="ctr"/>
+            <a:r>
+              <a:rPr lang="en-IN" sz="1100" dirty="0"/>
+              <a:t>XTAL</a:t>
+            </a:r>
+            <a:endParaRPr lang="en-IN" sz="1200" dirty="0"/>
+          </a:p>
+        </p:txBody>
+      </p:sp>
+      <p:cxnSp>
+        <p:nvCxnSpPr>
+          <p:cNvPr id="31" name="Straight Connector 30">
+            <a:extLst>
+              <a:ext uri="{FF2B5EF4-FFF2-40B4-BE49-F238E27FC236}">
+                <a16:creationId xmlns:a16="http://schemas.microsoft.com/office/drawing/2014/main" id="{A49F51A6-1D60-5B92-1AF4-E2D2C1F195BA}"/>
+              </a:ext>
+            </a:extLst>
+          </p:cNvPr>
+          <p:cNvCxnSpPr>
+            <a:cxnSpLocks/>
+          </p:cNvCxnSpPr>
+          <p:nvPr/>
+        </p:nvCxnSpPr>
+        <p:spPr>
+          <a:xfrm flipV="1">
+            <a:off x="3234662" y="1708817"/>
+            <a:ext cx="457290" cy="463517"/>
+          </a:xfrm>
+          <a:prstGeom prst="line">
+            <a:avLst/>
+          </a:prstGeom>
+          <a:ln w="6350">
+            <a:solidFill>
+              <a:schemeClr val="bg1">
+                <a:lumMod val="50000"/>
+              </a:schemeClr>
+            </a:solidFill>
+            <a:prstDash val="sysDot"/>
+          </a:ln>
+        </p:spPr>
+        <p:style>
+          <a:lnRef idx="1">
+            <a:schemeClr val="accent1"/>
+          </a:lnRef>
+          <a:fillRef idx="0">
+            <a:schemeClr val="accent1"/>
+          </a:fillRef>
+          <a:effectRef idx="0">
+            <a:schemeClr val="accent1"/>
+          </a:effectRef>
+          <a:fontRef idx="minor">
+            <a:schemeClr val="tx1"/>
+          </a:fontRef>
+        </p:style>
+      </p:cxnSp>
+      <p:cxnSp>
+        <p:nvCxnSpPr>
+          <p:cNvPr id="38" name="Straight Connector 37">
+            <a:extLst>
+              <a:ext uri="{FF2B5EF4-FFF2-40B4-BE49-F238E27FC236}">
+                <a16:creationId xmlns:a16="http://schemas.microsoft.com/office/drawing/2014/main" id="{3415EDD6-4C46-B241-C333-BF8B05302A8E}"/>
+              </a:ext>
+            </a:extLst>
+          </p:cNvPr>
+          <p:cNvCxnSpPr>
+            <a:cxnSpLocks/>
+          </p:cNvCxnSpPr>
+          <p:nvPr/>
+        </p:nvCxnSpPr>
+        <p:spPr>
+          <a:xfrm>
+            <a:off x="1168686" y="2065412"/>
+            <a:ext cx="2178000" cy="0"/>
+          </a:xfrm>
+          <a:prstGeom prst="line">
+            <a:avLst/>
+          </a:prstGeom>
+          <a:ln w="6350">
+            <a:solidFill>
+              <a:schemeClr val="bg1">
+                <a:lumMod val="50000"/>
+              </a:schemeClr>
+            </a:solidFill>
+            <a:prstDash val="sysDot"/>
+          </a:ln>
+        </p:spPr>
+        <p:style>
+          <a:lnRef idx="1">
+            <a:schemeClr val="accent1"/>
+          </a:lnRef>
+          <a:fillRef idx="0">
+            <a:schemeClr val="accent1"/>
+          </a:fillRef>
+          <a:effectRef idx="0">
+            <a:schemeClr val="accent1"/>
+          </a:effectRef>
+          <a:fontRef idx="minor">
+            <a:schemeClr val="tx1"/>
+          </a:fontRef>
+        </p:style>
+      </p:cxnSp>
+      <p:cxnSp>
+        <p:nvCxnSpPr>
+          <p:cNvPr id="39" name="Straight Connector 38">
+            <a:extLst>
+              <a:ext uri="{FF2B5EF4-FFF2-40B4-BE49-F238E27FC236}">
+                <a16:creationId xmlns:a16="http://schemas.microsoft.com/office/drawing/2014/main" id="{AE58119F-8256-42A9-AB68-152FCBF91815}"/>
+              </a:ext>
+            </a:extLst>
+          </p:cNvPr>
+          <p:cNvCxnSpPr>
+            <a:cxnSpLocks/>
+          </p:cNvCxnSpPr>
+          <p:nvPr/>
+        </p:nvCxnSpPr>
+        <p:spPr>
+          <a:xfrm>
+            <a:off x="3343286" y="2065412"/>
+            <a:ext cx="0" cy="1728192"/>
+          </a:xfrm>
+          <a:prstGeom prst="line">
+            <a:avLst/>
+          </a:prstGeom>
+          <a:ln w="6350">
+            <a:solidFill>
+              <a:schemeClr val="bg1">
+                <a:lumMod val="50000"/>
+              </a:schemeClr>
+            </a:solidFill>
+            <a:prstDash val="sysDot"/>
+          </a:ln>
+        </p:spPr>
+        <p:style>
+          <a:lnRef idx="1">
+            <a:schemeClr val="accent1"/>
+          </a:lnRef>
+          <a:fillRef idx="0">
+            <a:schemeClr val="accent1"/>
+          </a:fillRef>
+          <a:effectRef idx="0">
+            <a:schemeClr val="accent1"/>
+          </a:effectRef>
+          <a:fontRef idx="minor">
+            <a:schemeClr val="tx1"/>
+          </a:fontRef>
+        </p:style>
+      </p:cxnSp>
+      <p:cxnSp>
+        <p:nvCxnSpPr>
+          <p:cNvPr id="47" name="Straight Connector 46">
+            <a:extLst>
+              <a:ext uri="{FF2B5EF4-FFF2-40B4-BE49-F238E27FC236}">
+                <a16:creationId xmlns:a16="http://schemas.microsoft.com/office/drawing/2014/main" id="{4A3D362F-0616-DFC5-8219-750F851CAD50}"/>
+              </a:ext>
+            </a:extLst>
+          </p:cNvPr>
+          <p:cNvCxnSpPr>
+            <a:cxnSpLocks/>
+          </p:cNvCxnSpPr>
+          <p:nvPr/>
+        </p:nvCxnSpPr>
+        <p:spPr>
+          <a:xfrm>
+            <a:off x="1168686" y="1930527"/>
+            <a:ext cx="2304000" cy="0"/>
+          </a:xfrm>
+          <a:prstGeom prst="line">
+            <a:avLst/>
+          </a:prstGeom>
+          <a:ln w="6350">
+            <a:solidFill>
+              <a:schemeClr val="bg1">
+                <a:lumMod val="50000"/>
+              </a:schemeClr>
+            </a:solidFill>
+            <a:prstDash val="sysDot"/>
+          </a:ln>
+        </p:spPr>
+        <p:style>
+          <a:lnRef idx="1">
+            <a:schemeClr val="accent1"/>
+          </a:lnRef>
+          <a:fillRef idx="0">
+            <a:schemeClr val="accent1"/>
+          </a:fillRef>
+          <a:effectRef idx="0">
+            <a:schemeClr val="accent1"/>
+          </a:effectRef>
+          <a:fontRef idx="minor">
+            <a:schemeClr val="tx1"/>
+          </a:fontRef>
+        </p:style>
+      </p:cxnSp>
+      <p:cxnSp>
+        <p:nvCxnSpPr>
+          <p:cNvPr id="49" name="Straight Connector 48">
+            <a:extLst>
+              <a:ext uri="{FF2B5EF4-FFF2-40B4-BE49-F238E27FC236}">
+                <a16:creationId xmlns:a16="http://schemas.microsoft.com/office/drawing/2014/main" id="{762CDF32-4BA2-E25B-7601-BC23FCA7009F}"/>
+              </a:ext>
+            </a:extLst>
+          </p:cNvPr>
+          <p:cNvCxnSpPr>
+            <a:cxnSpLocks/>
+          </p:cNvCxnSpPr>
+          <p:nvPr/>
+        </p:nvCxnSpPr>
+        <p:spPr>
+          <a:xfrm>
+            <a:off x="3470305" y="1930527"/>
+            <a:ext cx="0" cy="1863079"/>
+          </a:xfrm>
+          <a:prstGeom prst="line">
+            <a:avLst/>
+          </a:prstGeom>
+          <a:ln w="6350">
+            <a:solidFill>
+              <a:schemeClr val="bg1">
+                <a:lumMod val="50000"/>
+              </a:schemeClr>
+            </a:solidFill>
+            <a:prstDash val="sysDot"/>
+          </a:ln>
+        </p:spPr>
+        <p:style>
+          <a:lnRef idx="1">
+            <a:schemeClr val="accent1"/>
+          </a:lnRef>
+          <a:fillRef idx="0">
+            <a:schemeClr val="accent1"/>
+          </a:fillRef>
+          <a:effectRef idx="0">
+            <a:schemeClr val="accent1"/>
+          </a:effectRef>
+          <a:fontRef idx="minor">
+            <a:schemeClr val="tx1"/>
+          </a:fontRef>
+        </p:style>
+      </p:cxnSp>
+      <p:cxnSp>
+        <p:nvCxnSpPr>
+          <p:cNvPr id="52" name="Straight Connector 51">
+            <a:extLst>
+              <a:ext uri="{FF2B5EF4-FFF2-40B4-BE49-F238E27FC236}">
+                <a16:creationId xmlns:a16="http://schemas.microsoft.com/office/drawing/2014/main" id="{A76EE3E2-653B-2132-6BD7-AD00667E3C61}"/>
+              </a:ext>
+            </a:extLst>
+          </p:cNvPr>
+          <p:cNvCxnSpPr>
+            <a:cxnSpLocks/>
+          </p:cNvCxnSpPr>
+          <p:nvPr/>
+        </p:nvCxnSpPr>
+        <p:spPr>
+          <a:xfrm>
+            <a:off x="1168686" y="1808333"/>
+            <a:ext cx="2422254" cy="0"/>
+          </a:xfrm>
+          <a:prstGeom prst="line">
+            <a:avLst/>
+          </a:prstGeom>
+          <a:ln w="6350">
+            <a:solidFill>
+              <a:schemeClr val="bg1">
+                <a:lumMod val="50000"/>
+              </a:schemeClr>
+            </a:solidFill>
+            <a:prstDash val="sysDot"/>
+          </a:ln>
+        </p:spPr>
+        <p:style>
+          <a:lnRef idx="1">
+            <a:schemeClr val="accent1"/>
+          </a:lnRef>
+          <a:fillRef idx="0">
+            <a:schemeClr val="accent1"/>
+          </a:fillRef>
+          <a:effectRef idx="0">
+            <a:schemeClr val="accent1"/>
+          </a:effectRef>
+          <a:fontRef idx="minor">
+            <a:schemeClr val="tx1"/>
+          </a:fontRef>
+        </p:style>
+      </p:cxnSp>
+      <p:cxnSp>
+        <p:nvCxnSpPr>
+          <p:cNvPr id="54" name="Straight Connector 53">
+            <a:extLst>
+              <a:ext uri="{FF2B5EF4-FFF2-40B4-BE49-F238E27FC236}">
+                <a16:creationId xmlns:a16="http://schemas.microsoft.com/office/drawing/2014/main" id="{985A8459-A798-15D9-56CC-D6F914AFEA28}"/>
+              </a:ext>
+            </a:extLst>
+          </p:cNvPr>
+          <p:cNvCxnSpPr>
+            <a:cxnSpLocks/>
+          </p:cNvCxnSpPr>
+          <p:nvPr/>
+        </p:nvCxnSpPr>
+        <p:spPr>
+          <a:xfrm>
+            <a:off x="3590940" y="1826752"/>
+            <a:ext cx="0" cy="1966852"/>
+          </a:xfrm>
+          <a:prstGeom prst="line">
+            <a:avLst/>
+          </a:prstGeom>
+          <a:ln w="6350">
+            <a:solidFill>
+              <a:schemeClr val="bg1">
+                <a:lumMod val="50000"/>
+              </a:schemeClr>
+            </a:solidFill>
+            <a:prstDash val="sysDot"/>
+          </a:ln>
+        </p:spPr>
+        <p:style>
+          <a:lnRef idx="1">
+            <a:schemeClr val="accent1"/>
+          </a:lnRef>
+          <a:fillRef idx="0">
+            <a:schemeClr val="accent1"/>
+          </a:fillRef>
+          <a:effectRef idx="0">
+            <a:schemeClr val="accent1"/>
+          </a:effectRef>
+          <a:fontRef idx="minor">
+            <a:schemeClr val="tx1"/>
+          </a:fontRef>
+        </p:style>
+      </p:cxnSp>
+      <p:sp>
+        <p:nvSpPr>
+          <p:cNvPr id="60" name="Rectangle 59">
+            <a:extLst>
+              <a:ext uri="{FF2B5EF4-FFF2-40B4-BE49-F238E27FC236}">
+                <a16:creationId xmlns:a16="http://schemas.microsoft.com/office/drawing/2014/main" id="{30D858A1-6FD4-59C4-8329-05DF384F6718}"/>
+              </a:ext>
+            </a:extLst>
+          </p:cNvPr>
+          <p:cNvSpPr/>
+          <p:nvPr/>
+        </p:nvSpPr>
+        <p:spPr>
+          <a:xfrm>
+            <a:off x="6444485" y="1981749"/>
+            <a:ext cx="504056" cy="373981"/>
+          </a:xfrm>
+          <a:prstGeom prst="rect">
+            <a:avLst/>
+          </a:prstGeom>
+        </p:spPr>
+        <p:style>
+          <a:lnRef idx="2">
+            <a:schemeClr val="accent1">
+              <a:shade val="15000"/>
+            </a:schemeClr>
+          </a:lnRef>
+          <a:fillRef idx="1">
+            <a:schemeClr val="accent1"/>
+          </a:fillRef>
+          <a:effectRef idx="0">
+            <a:schemeClr val="accent1"/>
+          </a:effectRef>
+          <a:fontRef idx="minor">
+            <a:schemeClr val="lt1"/>
+          </a:fontRef>
+        </p:style>
+        <p:txBody>
+          <a:bodyPr rtlCol="0" anchor="ctr"/>
+          <a:lstStyle/>
+          <a:p>
+            <a:pPr algn="ctr"/>
+            <a:r>
+              <a:rPr lang="en-IN" sz="1100" dirty="0"/>
+              <a:t>USBC</a:t>
+            </a:r>
+            <a:endParaRPr lang="en-IN" sz="1200" dirty="0"/>
           </a:p>
         </p:txBody>
       </p:sp>
@@ -10209,6 +11393,270 @@
           <a:chExt cx="0" cy="0"/>
         </a:xfrm>
       </p:grpSpPr>
+      <p:cxnSp>
+        <p:nvCxnSpPr>
+          <p:cNvPr id="46" name="Connector: Elbow 45">
+            <a:extLst>
+              <a:ext uri="{FF2B5EF4-FFF2-40B4-BE49-F238E27FC236}">
+                <a16:creationId xmlns:a16="http://schemas.microsoft.com/office/drawing/2014/main" id="{7F275060-18AA-F771-B62E-E5093A73A6E8}"/>
+              </a:ext>
+            </a:extLst>
+          </p:cNvPr>
+          <p:cNvCxnSpPr>
+            <a:stCxn id="6" idx="3"/>
+          </p:cNvCxnSpPr>
+          <p:nvPr/>
+        </p:nvCxnSpPr>
+        <p:spPr>
+          <a:xfrm flipV="1">
+            <a:off x="3988122" y="3728068"/>
+            <a:ext cx="2312244" cy="685642"/>
+          </a:xfrm>
+          <a:prstGeom prst="bentConnector3">
+            <a:avLst>
+              <a:gd name="adj1" fmla="val 12926"/>
+            </a:avLst>
+          </a:prstGeom>
+          <a:ln>
+            <a:prstDash val="sysDot"/>
+            <a:tailEnd type="triangle"/>
+          </a:ln>
+        </p:spPr>
+        <p:style>
+          <a:lnRef idx="2">
+            <a:schemeClr val="accent2"/>
+          </a:lnRef>
+          <a:fillRef idx="0">
+            <a:schemeClr val="accent2"/>
+          </a:fillRef>
+          <a:effectRef idx="1">
+            <a:schemeClr val="accent2"/>
+          </a:effectRef>
+          <a:fontRef idx="minor">
+            <a:schemeClr val="tx1"/>
+          </a:fontRef>
+        </p:style>
+      </p:cxnSp>
+      <p:cxnSp>
+        <p:nvCxnSpPr>
+          <p:cNvPr id="56" name="Connector: Elbow 55">
+            <a:extLst>
+              <a:ext uri="{FF2B5EF4-FFF2-40B4-BE49-F238E27FC236}">
+                <a16:creationId xmlns:a16="http://schemas.microsoft.com/office/drawing/2014/main" id="{15300E0F-B8BA-7B9A-4A6C-75566E7C092A}"/>
+              </a:ext>
+            </a:extLst>
+          </p:cNvPr>
+          <p:cNvCxnSpPr>
+            <a:stCxn id="6" idx="3"/>
+            <a:endCxn id="4" idx="1"/>
+          </p:cNvCxnSpPr>
+          <p:nvPr/>
+        </p:nvCxnSpPr>
+        <p:spPr>
+          <a:xfrm flipV="1">
+            <a:off x="3988122" y="3081562"/>
+            <a:ext cx="511870" cy="1332148"/>
+          </a:xfrm>
+          <a:prstGeom prst="bentConnector3">
+            <a:avLst>
+              <a:gd name="adj1" fmla="val 58374"/>
+            </a:avLst>
+          </a:prstGeom>
+          <a:ln>
+            <a:prstDash val="sysDot"/>
+            <a:tailEnd type="triangle"/>
+          </a:ln>
+        </p:spPr>
+        <p:style>
+          <a:lnRef idx="2">
+            <a:schemeClr val="accent2"/>
+          </a:lnRef>
+          <a:fillRef idx="0">
+            <a:schemeClr val="accent2"/>
+          </a:fillRef>
+          <a:effectRef idx="1">
+            <a:schemeClr val="accent2"/>
+          </a:effectRef>
+          <a:fontRef idx="minor">
+            <a:schemeClr val="tx1"/>
+          </a:fontRef>
+        </p:style>
+      </p:cxnSp>
+      <p:cxnSp>
+        <p:nvCxnSpPr>
+          <p:cNvPr id="33" name="Connector: Elbow 32">
+            <a:extLst>
+              <a:ext uri="{FF2B5EF4-FFF2-40B4-BE49-F238E27FC236}">
+                <a16:creationId xmlns:a16="http://schemas.microsoft.com/office/drawing/2014/main" id="{BD0F0FF7-0D24-68A1-4A67-A1602E0DEF55}"/>
+              </a:ext>
+            </a:extLst>
+          </p:cNvPr>
+          <p:cNvCxnSpPr>
+            <a:stCxn id="5" idx="3"/>
+            <a:endCxn id="7" idx="1"/>
+          </p:cNvCxnSpPr>
+          <p:nvPr/>
+        </p:nvCxnSpPr>
+        <p:spPr>
+          <a:xfrm>
+            <a:off x="3988122" y="3081562"/>
+            <a:ext cx="504000" cy="1008000"/>
+          </a:xfrm>
+          <a:prstGeom prst="bentConnector3">
+            <a:avLst>
+              <a:gd name="adj1" fmla="val 33936"/>
+            </a:avLst>
+          </a:prstGeom>
+          <a:ln>
+            <a:prstDash val="sysDot"/>
+            <a:headEnd type="none" w="med" len="med"/>
+            <a:tailEnd type="triangle" w="med" len="med"/>
+          </a:ln>
+        </p:spPr>
+        <p:style>
+          <a:lnRef idx="2">
+            <a:schemeClr val="accent4"/>
+          </a:lnRef>
+          <a:fillRef idx="0">
+            <a:schemeClr val="accent4"/>
+          </a:fillRef>
+          <a:effectRef idx="1">
+            <a:schemeClr val="accent4"/>
+          </a:effectRef>
+          <a:fontRef idx="minor">
+            <a:schemeClr val="tx1"/>
+          </a:fontRef>
+        </p:style>
+      </p:cxnSp>
+      <p:cxnSp>
+        <p:nvCxnSpPr>
+          <p:cNvPr id="59" name="Connector: Elbow 58">
+            <a:extLst>
+              <a:ext uri="{FF2B5EF4-FFF2-40B4-BE49-F238E27FC236}">
+                <a16:creationId xmlns:a16="http://schemas.microsoft.com/office/drawing/2014/main" id="{684C1603-E469-4405-A0D0-93923150619A}"/>
+              </a:ext>
+            </a:extLst>
+          </p:cNvPr>
+          <p:cNvCxnSpPr>
+            <a:cxnSpLocks/>
+            <a:stCxn id="6" idx="3"/>
+            <a:endCxn id="8" idx="1"/>
+          </p:cNvCxnSpPr>
+          <p:nvPr/>
+        </p:nvCxnSpPr>
+        <p:spPr>
+          <a:xfrm flipV="1">
+            <a:off x="3988122" y="1749414"/>
+            <a:ext cx="511870" cy="2664296"/>
+          </a:xfrm>
+          <a:prstGeom prst="bentConnector3">
+            <a:avLst>
+              <a:gd name="adj1" fmla="val 59304"/>
+            </a:avLst>
+          </a:prstGeom>
+          <a:ln>
+            <a:prstDash val="sysDot"/>
+            <a:tailEnd type="triangle"/>
+          </a:ln>
+        </p:spPr>
+        <p:style>
+          <a:lnRef idx="2">
+            <a:schemeClr val="accent2"/>
+          </a:lnRef>
+          <a:fillRef idx="0">
+            <a:schemeClr val="accent2"/>
+          </a:fillRef>
+          <a:effectRef idx="1">
+            <a:schemeClr val="accent2"/>
+          </a:effectRef>
+          <a:fontRef idx="minor">
+            <a:schemeClr val="tx1"/>
+          </a:fontRef>
+        </p:style>
+      </p:cxnSp>
+      <p:cxnSp>
+        <p:nvCxnSpPr>
+          <p:cNvPr id="1069" name="Straight Arrow Connector 1068">
+            <a:extLst>
+              <a:ext uri="{FF2B5EF4-FFF2-40B4-BE49-F238E27FC236}">
+                <a16:creationId xmlns:a16="http://schemas.microsoft.com/office/drawing/2014/main" id="{3ACE9092-1A2D-E2E4-87C9-5B5F3D3CBE86}"/>
+              </a:ext>
+            </a:extLst>
+          </p:cNvPr>
+          <p:cNvCxnSpPr>
+            <a:cxnSpLocks/>
+          </p:cNvCxnSpPr>
+          <p:nvPr/>
+        </p:nvCxnSpPr>
+        <p:spPr>
+          <a:xfrm>
+            <a:off x="3988122" y="3249291"/>
+            <a:ext cx="2312244" cy="0"/>
+          </a:xfrm>
+          <a:prstGeom prst="straightConnector1">
+            <a:avLst/>
+          </a:prstGeom>
+          <a:ln>
+            <a:tailEnd type="triangle"/>
+          </a:ln>
+        </p:spPr>
+        <p:style>
+          <a:lnRef idx="2">
+            <a:schemeClr val="accent6"/>
+          </a:lnRef>
+          <a:fillRef idx="0">
+            <a:schemeClr val="accent6"/>
+          </a:fillRef>
+          <a:effectRef idx="1">
+            <a:schemeClr val="accent6"/>
+          </a:effectRef>
+          <a:fontRef idx="minor">
+            <a:schemeClr val="tx1"/>
+          </a:fontRef>
+        </p:style>
+      </p:cxnSp>
+      <p:cxnSp>
+        <p:nvCxnSpPr>
+          <p:cNvPr id="1044" name="Straight Arrow Connector 1043">
+            <a:extLst>
+              <a:ext uri="{FF2B5EF4-FFF2-40B4-BE49-F238E27FC236}">
+                <a16:creationId xmlns:a16="http://schemas.microsoft.com/office/drawing/2014/main" id="{972CBC81-6ED0-C6CA-A148-2E85CB8529A3}"/>
+              </a:ext>
+            </a:extLst>
+          </p:cNvPr>
+          <p:cNvCxnSpPr>
+            <a:cxnSpLocks/>
+          </p:cNvCxnSpPr>
+          <p:nvPr/>
+        </p:nvCxnSpPr>
+        <p:spPr>
+          <a:xfrm>
+            <a:off x="2181781" y="2915415"/>
+            <a:ext cx="2310341" cy="0"/>
+          </a:xfrm>
+          <a:prstGeom prst="straightConnector1">
+            <a:avLst/>
+          </a:prstGeom>
+          <a:ln>
+            <a:headEnd type="triangle" w="med" len="med"/>
+            <a:tailEnd type="triangle" w="med" len="med"/>
+          </a:ln>
+        </p:spPr>
+        <p:style>
+          <a:lnRef idx="2">
+            <a:schemeClr val="accent5"/>
+          </a:lnRef>
+          <a:fillRef idx="0">
+            <a:schemeClr val="accent5"/>
+          </a:fillRef>
+          <a:effectRef idx="1">
+            <a:schemeClr val="accent5"/>
+          </a:effectRef>
+          <a:fontRef idx="minor">
+            <a:schemeClr val="tx1"/>
+          </a:fontRef>
+        </p:style>
+      </p:cxnSp>
       <p:sp>
         <p:nvSpPr>
           <p:cNvPr id="2" name="Title 1"/>
@@ -10256,7 +11704,7 @@
             <a:fld id="{8D12EC46-F5D3-4572-AED1-9CCC8CB80B60}" type="datetime1">
               <a:rPr lang="en-US" smtClean="0"/>
               <a:pPr/>
-              <a:t>6/21/2026</a:t>
+              <a:t>6/22/2026</a:t>
             </a:fld>
             <a:endParaRPr lang="en-US" dirty="0"/>
           </a:p>
@@ -10486,7 +11934,1968 @@
                   <a:srgbClr val="FF0000"/>
                 </a:solidFill>
               </a:rPr>
-              <a:t>*Part may be replaced per availability</a:t>
+              <a:t>*Part may be changed per availability</a:t>
+            </a:r>
+          </a:p>
+        </p:txBody>
+      </p:sp>
+      <p:sp>
+        <p:nvSpPr>
+          <p:cNvPr id="7" name="Rectangle 6">
+            <a:extLst>
+              <a:ext uri="{FF2B5EF4-FFF2-40B4-BE49-F238E27FC236}">
+                <a16:creationId xmlns:a16="http://schemas.microsoft.com/office/drawing/2014/main" id="{C03253EB-07C8-5730-0B24-7DDCCD38D93C}"/>
+              </a:ext>
+            </a:extLst>
+          </p:cNvPr>
+          <p:cNvSpPr/>
+          <p:nvPr/>
+        </p:nvSpPr>
+        <p:spPr>
+          <a:xfrm>
+            <a:off x="4499992" y="3873650"/>
+            <a:ext cx="1288504" cy="1080120"/>
+          </a:xfrm>
+          <a:prstGeom prst="rect">
+            <a:avLst/>
+          </a:prstGeom>
+        </p:spPr>
+        <p:style>
+          <a:lnRef idx="2">
+            <a:schemeClr val="accent1">
+              <a:shade val="15000"/>
+            </a:schemeClr>
+          </a:lnRef>
+          <a:fillRef idx="1">
+            <a:schemeClr val="accent1"/>
+          </a:fillRef>
+          <a:effectRef idx="0">
+            <a:schemeClr val="accent1"/>
+          </a:effectRef>
+          <a:fontRef idx="minor">
+            <a:schemeClr val="lt1"/>
+          </a:fontRef>
+        </p:style>
+        <p:txBody>
+          <a:bodyPr rtlCol="0" anchor="ctr"/>
+          <a:lstStyle/>
+          <a:p>
+            <a:pPr algn="ctr"/>
+            <a:r>
+              <a:rPr lang="en-IN" sz="1400" dirty="0"/>
+              <a:t>RTC</a:t>
+            </a:r>
+          </a:p>
+          <a:p>
+            <a:pPr algn="ctr"/>
+            <a:r>
+              <a:rPr lang="en-IN" sz="1400" dirty="0"/>
+              <a:t>(RV-8263-C7)</a:t>
+            </a:r>
+          </a:p>
+        </p:txBody>
+      </p:sp>
+      <p:sp>
+        <p:nvSpPr>
+          <p:cNvPr id="8" name="Rectangle 7">
+            <a:extLst>
+              <a:ext uri="{FF2B5EF4-FFF2-40B4-BE49-F238E27FC236}">
+                <a16:creationId xmlns:a16="http://schemas.microsoft.com/office/drawing/2014/main" id="{F2F2B9D7-BE89-0C3C-979E-6D0CB3AECCD7}"/>
+              </a:ext>
+            </a:extLst>
+          </p:cNvPr>
+          <p:cNvSpPr/>
+          <p:nvPr/>
+        </p:nvSpPr>
+        <p:spPr>
+          <a:xfrm>
+            <a:off x="4499992" y="1209354"/>
+            <a:ext cx="1288504" cy="1080120"/>
+          </a:xfrm>
+          <a:prstGeom prst="rect">
+            <a:avLst/>
+          </a:prstGeom>
+        </p:spPr>
+        <p:style>
+          <a:lnRef idx="2">
+            <a:schemeClr val="accent1">
+              <a:shade val="15000"/>
+            </a:schemeClr>
+          </a:lnRef>
+          <a:fillRef idx="1">
+            <a:schemeClr val="accent1"/>
+          </a:fillRef>
+          <a:effectRef idx="0">
+            <a:schemeClr val="accent1"/>
+          </a:effectRef>
+          <a:fontRef idx="minor">
+            <a:schemeClr val="lt1"/>
+          </a:fontRef>
+        </p:style>
+        <p:txBody>
+          <a:bodyPr rtlCol="0" anchor="ctr"/>
+          <a:lstStyle/>
+          <a:p>
+            <a:pPr algn="ctr"/>
+            <a:r>
+              <a:rPr lang="en-IN" sz="1400" dirty="0"/>
+              <a:t>Temperature</a:t>
+            </a:r>
+          </a:p>
+          <a:p>
+            <a:pPr algn="ctr"/>
+            <a:r>
+              <a:rPr lang="en-IN" sz="1400" dirty="0"/>
+              <a:t>Sensor</a:t>
+            </a:r>
+          </a:p>
+          <a:p>
+            <a:pPr algn="ctr"/>
+            <a:r>
+              <a:rPr lang="en-IN" sz="1400" dirty="0"/>
+              <a:t>(HDC3022)</a:t>
+            </a:r>
+          </a:p>
+        </p:txBody>
+      </p:sp>
+      <p:sp>
+        <p:nvSpPr>
+          <p:cNvPr id="9" name="Rectangle 8">
+            <a:extLst>
+              <a:ext uri="{FF2B5EF4-FFF2-40B4-BE49-F238E27FC236}">
+                <a16:creationId xmlns:a16="http://schemas.microsoft.com/office/drawing/2014/main" id="{E7D21B8A-8CAE-115B-82F3-217FF6AA9DCA}"/>
+              </a:ext>
+            </a:extLst>
+          </p:cNvPr>
+          <p:cNvSpPr/>
+          <p:nvPr/>
+        </p:nvSpPr>
+        <p:spPr>
+          <a:xfrm>
+            <a:off x="3412058" y="1204988"/>
+            <a:ext cx="576064" cy="1098549"/>
+          </a:xfrm>
+          <a:prstGeom prst="rect">
+            <a:avLst/>
+          </a:prstGeom>
+        </p:spPr>
+        <p:style>
+          <a:lnRef idx="2">
+            <a:schemeClr val="accent1">
+              <a:shade val="15000"/>
+            </a:schemeClr>
+          </a:lnRef>
+          <a:fillRef idx="1">
+            <a:schemeClr val="accent1"/>
+          </a:fillRef>
+          <a:effectRef idx="0">
+            <a:schemeClr val="accent1"/>
+          </a:effectRef>
+          <a:fontRef idx="minor">
+            <a:schemeClr val="lt1"/>
+          </a:fontRef>
+        </p:style>
+        <p:txBody>
+          <a:bodyPr rtlCol="0" anchor="ctr"/>
+          <a:lstStyle/>
+          <a:p>
+            <a:pPr algn="ctr"/>
+            <a:r>
+              <a:rPr lang="en-IN" sz="1400" dirty="0"/>
+              <a:t>BLE</a:t>
+            </a:r>
+          </a:p>
+          <a:p>
+            <a:pPr algn="ctr"/>
+            <a:r>
+              <a:rPr lang="en-IN" sz="1400" dirty="0"/>
+              <a:t>ANT</a:t>
+            </a:r>
+          </a:p>
+        </p:txBody>
+      </p:sp>
+      <p:sp>
+        <p:nvSpPr>
+          <p:cNvPr id="13" name="Rectangle 12">
+            <a:extLst>
+              <a:ext uri="{FF2B5EF4-FFF2-40B4-BE49-F238E27FC236}">
+                <a16:creationId xmlns:a16="http://schemas.microsoft.com/office/drawing/2014/main" id="{7E2D7AF1-06F5-9C8A-F1EE-74F5A80346A4}"/>
+              </a:ext>
+            </a:extLst>
+          </p:cNvPr>
+          <p:cNvSpPr/>
+          <p:nvPr/>
+        </p:nvSpPr>
+        <p:spPr>
+          <a:xfrm>
+            <a:off x="2699618" y="1216796"/>
+            <a:ext cx="576063" cy="1086741"/>
+          </a:xfrm>
+          <a:prstGeom prst="rect">
+            <a:avLst/>
+          </a:prstGeom>
+        </p:spPr>
+        <p:style>
+          <a:lnRef idx="2">
+            <a:schemeClr val="accent1">
+              <a:shade val="15000"/>
+            </a:schemeClr>
+          </a:lnRef>
+          <a:fillRef idx="1">
+            <a:schemeClr val="accent1"/>
+          </a:fillRef>
+          <a:effectRef idx="0">
+            <a:schemeClr val="accent1"/>
+          </a:effectRef>
+          <a:fontRef idx="minor">
+            <a:schemeClr val="lt1"/>
+          </a:fontRef>
+        </p:style>
+        <p:txBody>
+          <a:bodyPr rtlCol="0" anchor="ctr"/>
+          <a:lstStyle/>
+          <a:p>
+            <a:pPr algn="ctr"/>
+            <a:r>
+              <a:rPr lang="en-IN" sz="1400" dirty="0"/>
+              <a:t>XTAL</a:t>
+            </a:r>
+          </a:p>
+        </p:txBody>
+      </p:sp>
+      <p:cxnSp>
+        <p:nvCxnSpPr>
+          <p:cNvPr id="17" name="Straight Arrow Connector 16">
+            <a:extLst>
+              <a:ext uri="{FF2B5EF4-FFF2-40B4-BE49-F238E27FC236}">
+                <a16:creationId xmlns:a16="http://schemas.microsoft.com/office/drawing/2014/main" id="{3BBD609C-445B-F9C2-123E-BD8EA8B1416B}"/>
+              </a:ext>
+            </a:extLst>
+          </p:cNvPr>
+          <p:cNvCxnSpPr>
+            <a:stCxn id="14" idx="3"/>
+            <a:endCxn id="6" idx="1"/>
+          </p:cNvCxnSpPr>
+          <p:nvPr/>
+        </p:nvCxnSpPr>
+        <p:spPr>
+          <a:xfrm>
+            <a:off x="2187748" y="4413709"/>
+            <a:ext cx="511870" cy="1"/>
+          </a:xfrm>
+          <a:prstGeom prst="straightConnector1">
+            <a:avLst/>
+          </a:prstGeom>
+          <a:ln>
+            <a:solidFill>
+              <a:srgbClr val="FF0000"/>
+            </a:solidFill>
+            <a:tailEnd type="triangle"/>
+          </a:ln>
+        </p:spPr>
+        <p:style>
+          <a:lnRef idx="2">
+            <a:schemeClr val="accent2"/>
+          </a:lnRef>
+          <a:fillRef idx="0">
+            <a:schemeClr val="accent2"/>
+          </a:fillRef>
+          <a:effectRef idx="1">
+            <a:schemeClr val="accent2"/>
+          </a:effectRef>
+          <a:fontRef idx="minor">
+            <a:schemeClr val="tx1"/>
+          </a:fontRef>
+        </p:style>
+      </p:cxnSp>
+      <p:cxnSp>
+        <p:nvCxnSpPr>
+          <p:cNvPr id="19" name="Straight Arrow Connector 18">
+            <a:extLst>
+              <a:ext uri="{FF2B5EF4-FFF2-40B4-BE49-F238E27FC236}">
+                <a16:creationId xmlns:a16="http://schemas.microsoft.com/office/drawing/2014/main" id="{9D5F3288-27E0-F6A2-CC99-F867B9AD3BA9}"/>
+              </a:ext>
+            </a:extLst>
+          </p:cNvPr>
+          <p:cNvCxnSpPr>
+            <a:cxnSpLocks/>
+          </p:cNvCxnSpPr>
+          <p:nvPr/>
+        </p:nvCxnSpPr>
+        <p:spPr>
+          <a:xfrm>
+            <a:off x="2984077" y="2303537"/>
+            <a:ext cx="0" cy="227622"/>
+          </a:xfrm>
+          <a:prstGeom prst="straightConnector1">
+            <a:avLst/>
+          </a:prstGeom>
+          <a:ln>
+            <a:tailEnd type="triangle"/>
+          </a:ln>
+        </p:spPr>
+        <p:style>
+          <a:lnRef idx="2">
+            <a:schemeClr val="dk1"/>
+          </a:lnRef>
+          <a:fillRef idx="0">
+            <a:schemeClr val="dk1"/>
+          </a:fillRef>
+          <a:effectRef idx="1">
+            <a:schemeClr val="dk1"/>
+          </a:effectRef>
+          <a:fontRef idx="minor">
+            <a:schemeClr val="tx1"/>
+          </a:fontRef>
+        </p:style>
+      </p:cxnSp>
+      <p:cxnSp>
+        <p:nvCxnSpPr>
+          <p:cNvPr id="21" name="Straight Arrow Connector 20">
+            <a:extLst>
+              <a:ext uri="{FF2B5EF4-FFF2-40B4-BE49-F238E27FC236}">
+                <a16:creationId xmlns:a16="http://schemas.microsoft.com/office/drawing/2014/main" id="{9ECB19F9-E264-6AB3-F92D-78ABEBF8FB86}"/>
+              </a:ext>
+            </a:extLst>
+          </p:cNvPr>
+          <p:cNvCxnSpPr>
+            <a:cxnSpLocks/>
+          </p:cNvCxnSpPr>
+          <p:nvPr/>
+        </p:nvCxnSpPr>
+        <p:spPr>
+          <a:xfrm>
+            <a:off x="3700090" y="2303537"/>
+            <a:ext cx="0" cy="237965"/>
+          </a:xfrm>
+          <a:prstGeom prst="straightConnector1">
+            <a:avLst/>
+          </a:prstGeom>
+          <a:ln>
+            <a:headEnd type="triangle" w="med" len="med"/>
+            <a:tailEnd type="triangle" w="med" len="med"/>
+          </a:ln>
+        </p:spPr>
+        <p:style>
+          <a:lnRef idx="2">
+            <a:schemeClr val="dk1"/>
+          </a:lnRef>
+          <a:fillRef idx="0">
+            <a:schemeClr val="dk1"/>
+          </a:fillRef>
+          <a:effectRef idx="1">
+            <a:schemeClr val="dk1"/>
+          </a:effectRef>
+          <a:fontRef idx="minor">
+            <a:schemeClr val="tx1"/>
+          </a:fontRef>
+        </p:style>
+      </p:cxnSp>
+      <p:cxnSp>
+        <p:nvCxnSpPr>
+          <p:cNvPr id="27" name="Straight Arrow Connector 26">
+            <a:extLst>
+              <a:ext uri="{FF2B5EF4-FFF2-40B4-BE49-F238E27FC236}">
+                <a16:creationId xmlns:a16="http://schemas.microsoft.com/office/drawing/2014/main" id="{553EB0D9-CD51-352D-7CA2-42C1E282BC62}"/>
+              </a:ext>
+            </a:extLst>
+          </p:cNvPr>
+          <p:cNvCxnSpPr>
+            <a:cxnSpLocks/>
+          </p:cNvCxnSpPr>
+          <p:nvPr/>
+        </p:nvCxnSpPr>
+        <p:spPr>
+          <a:xfrm>
+            <a:off x="5788496" y="2912764"/>
+            <a:ext cx="511870" cy="4105"/>
+          </a:xfrm>
+          <a:prstGeom prst="straightConnector1">
+            <a:avLst/>
+          </a:prstGeom>
+          <a:ln>
+            <a:tailEnd type="triangle"/>
+          </a:ln>
+        </p:spPr>
+        <p:style>
+          <a:lnRef idx="2">
+            <a:schemeClr val="accent6"/>
+          </a:lnRef>
+          <a:fillRef idx="0">
+            <a:schemeClr val="accent6"/>
+          </a:fillRef>
+          <a:effectRef idx="1">
+            <a:schemeClr val="accent6"/>
+          </a:effectRef>
+          <a:fontRef idx="minor">
+            <a:schemeClr val="tx1"/>
+          </a:fontRef>
+        </p:style>
+      </p:cxnSp>
+      <p:cxnSp>
+        <p:nvCxnSpPr>
+          <p:cNvPr id="29" name="Straight Arrow Connector 28">
+            <a:extLst>
+              <a:ext uri="{FF2B5EF4-FFF2-40B4-BE49-F238E27FC236}">
+                <a16:creationId xmlns:a16="http://schemas.microsoft.com/office/drawing/2014/main" id="{CBE06AB0-0FCE-36A2-D33C-0146E77E8277}"/>
+              </a:ext>
+            </a:extLst>
+          </p:cNvPr>
+          <p:cNvCxnSpPr>
+            <a:cxnSpLocks/>
+          </p:cNvCxnSpPr>
+          <p:nvPr/>
+        </p:nvCxnSpPr>
+        <p:spPr>
+          <a:xfrm flipV="1">
+            <a:off x="2984077" y="3621622"/>
+            <a:ext cx="0" cy="252028"/>
+          </a:xfrm>
+          <a:prstGeom prst="straightConnector1">
+            <a:avLst/>
+          </a:prstGeom>
+          <a:ln>
+            <a:tailEnd type="triangle"/>
+          </a:ln>
+        </p:spPr>
+        <p:style>
+          <a:lnRef idx="2">
+            <a:schemeClr val="accent2"/>
+          </a:lnRef>
+          <a:fillRef idx="0">
+            <a:schemeClr val="accent2"/>
+          </a:fillRef>
+          <a:effectRef idx="1">
+            <a:schemeClr val="accent2"/>
+          </a:effectRef>
+          <a:fontRef idx="minor">
+            <a:schemeClr val="tx1"/>
+          </a:fontRef>
+        </p:style>
+      </p:cxnSp>
+      <p:cxnSp>
+        <p:nvCxnSpPr>
+          <p:cNvPr id="31" name="Straight Arrow Connector 30">
+            <a:extLst>
+              <a:ext uri="{FF2B5EF4-FFF2-40B4-BE49-F238E27FC236}">
+                <a16:creationId xmlns:a16="http://schemas.microsoft.com/office/drawing/2014/main" id="{CF3D67AD-EC0D-E298-C1CC-C18B155BEA72}"/>
+              </a:ext>
+            </a:extLst>
+          </p:cNvPr>
+          <p:cNvCxnSpPr>
+            <a:cxnSpLocks/>
+          </p:cNvCxnSpPr>
+          <p:nvPr/>
+        </p:nvCxnSpPr>
+        <p:spPr>
+          <a:xfrm flipV="1">
+            <a:off x="3700090" y="3621622"/>
+            <a:ext cx="0" cy="252027"/>
+          </a:xfrm>
+          <a:prstGeom prst="straightConnector1">
+            <a:avLst/>
+          </a:prstGeom>
+          <a:ln>
+            <a:headEnd type="triangle" w="med" len="med"/>
+            <a:tailEnd type="triangle" w="med" len="med"/>
+          </a:ln>
+        </p:spPr>
+        <p:style>
+          <a:lnRef idx="2">
+            <a:schemeClr val="accent4"/>
+          </a:lnRef>
+          <a:fillRef idx="0">
+            <a:schemeClr val="accent4"/>
+          </a:fillRef>
+          <a:effectRef idx="1">
+            <a:schemeClr val="accent4"/>
+          </a:effectRef>
+          <a:fontRef idx="minor">
+            <a:schemeClr val="tx1"/>
+          </a:fontRef>
+        </p:style>
+      </p:cxnSp>
+      <p:cxnSp>
+        <p:nvCxnSpPr>
+          <p:cNvPr id="35" name="Connector: Elbow 34">
+            <a:extLst>
+              <a:ext uri="{FF2B5EF4-FFF2-40B4-BE49-F238E27FC236}">
+                <a16:creationId xmlns:a16="http://schemas.microsoft.com/office/drawing/2014/main" id="{2A113763-0D61-58A2-4A1C-2E5162BCC2BE}"/>
+              </a:ext>
+            </a:extLst>
+          </p:cNvPr>
+          <p:cNvCxnSpPr>
+            <a:cxnSpLocks/>
+          </p:cNvCxnSpPr>
+          <p:nvPr/>
+        </p:nvCxnSpPr>
+        <p:spPr>
+          <a:xfrm flipV="1">
+            <a:off x="3980252" y="1465087"/>
+            <a:ext cx="511870" cy="1620000"/>
+          </a:xfrm>
+          <a:prstGeom prst="bentConnector3">
+            <a:avLst>
+              <a:gd name="adj1" fmla="val 36044"/>
+            </a:avLst>
+          </a:prstGeom>
+          <a:ln>
+            <a:prstDash val="sysDot"/>
+            <a:headEnd type="triangle" w="med" len="med"/>
+            <a:tailEnd type="triangle" w="med" len="med"/>
+          </a:ln>
+        </p:spPr>
+        <p:style>
+          <a:lnRef idx="2">
+            <a:schemeClr val="accent4"/>
+          </a:lnRef>
+          <a:fillRef idx="0">
+            <a:schemeClr val="accent4"/>
+          </a:fillRef>
+          <a:effectRef idx="1">
+            <a:schemeClr val="accent4"/>
+          </a:effectRef>
+          <a:fontRef idx="minor">
+            <a:schemeClr val="tx1"/>
+          </a:fontRef>
+        </p:style>
+      </p:cxnSp>
+      <p:cxnSp>
+        <p:nvCxnSpPr>
+          <p:cNvPr id="23" name="Straight Arrow Connector 22">
+            <a:extLst>
+              <a:ext uri="{FF2B5EF4-FFF2-40B4-BE49-F238E27FC236}">
+                <a16:creationId xmlns:a16="http://schemas.microsoft.com/office/drawing/2014/main" id="{78321E13-9BBE-16AE-8E9A-1E2B1E20A879}"/>
+              </a:ext>
+            </a:extLst>
+          </p:cNvPr>
+          <p:cNvCxnSpPr/>
+          <p:nvPr/>
+        </p:nvCxnSpPr>
+        <p:spPr>
+          <a:xfrm>
+            <a:off x="3988122" y="2722162"/>
+            <a:ext cx="511870" cy="0"/>
+          </a:xfrm>
+          <a:prstGeom prst="straightConnector1">
+            <a:avLst/>
+          </a:prstGeom>
+          <a:ln>
+            <a:headEnd type="triangle" w="med" len="med"/>
+            <a:tailEnd type="triangle" w="med" len="med"/>
+          </a:ln>
+        </p:spPr>
+        <p:style>
+          <a:lnRef idx="2">
+            <a:schemeClr val="accent3"/>
+          </a:lnRef>
+          <a:fillRef idx="0">
+            <a:schemeClr val="accent3"/>
+          </a:fillRef>
+          <a:effectRef idx="1">
+            <a:schemeClr val="accent3"/>
+          </a:effectRef>
+          <a:fontRef idx="minor">
+            <a:schemeClr val="tx1"/>
+          </a:fontRef>
+        </p:style>
+      </p:cxnSp>
+      <p:cxnSp>
+        <p:nvCxnSpPr>
+          <p:cNvPr id="38" name="Straight Arrow Connector 37">
+            <a:extLst>
+              <a:ext uri="{FF2B5EF4-FFF2-40B4-BE49-F238E27FC236}">
+                <a16:creationId xmlns:a16="http://schemas.microsoft.com/office/drawing/2014/main" id="{807251BC-AA67-1338-F2EC-D0D1B027ADB5}"/>
+              </a:ext>
+            </a:extLst>
+          </p:cNvPr>
+          <p:cNvCxnSpPr>
+            <a:stCxn id="6" idx="0"/>
+            <a:endCxn id="5" idx="2"/>
+          </p:cNvCxnSpPr>
+          <p:nvPr/>
+        </p:nvCxnSpPr>
+        <p:spPr>
+          <a:xfrm flipV="1">
+            <a:off x="3343870" y="3621622"/>
+            <a:ext cx="0" cy="252028"/>
+          </a:xfrm>
+          <a:prstGeom prst="straightConnector1">
+            <a:avLst/>
+          </a:prstGeom>
+          <a:ln>
+            <a:tailEnd type="triangle"/>
+          </a:ln>
+        </p:spPr>
+        <p:style>
+          <a:lnRef idx="2">
+            <a:schemeClr val="dk1"/>
+          </a:lnRef>
+          <a:fillRef idx="0">
+            <a:schemeClr val="dk1"/>
+          </a:fillRef>
+          <a:effectRef idx="1">
+            <a:schemeClr val="dk1"/>
+          </a:effectRef>
+          <a:fontRef idx="minor">
+            <a:schemeClr val="tx1"/>
+          </a:fontRef>
+        </p:style>
+      </p:cxnSp>
+      <p:cxnSp>
+        <p:nvCxnSpPr>
+          <p:cNvPr id="49" name="Straight Arrow Connector 48">
+            <a:extLst>
+              <a:ext uri="{FF2B5EF4-FFF2-40B4-BE49-F238E27FC236}">
+                <a16:creationId xmlns:a16="http://schemas.microsoft.com/office/drawing/2014/main" id="{374C75E5-04A6-F1A0-A4FE-10C6D63F0D52}"/>
+              </a:ext>
+            </a:extLst>
+          </p:cNvPr>
+          <p:cNvCxnSpPr>
+            <a:stCxn id="6" idx="3"/>
+            <a:endCxn id="7" idx="1"/>
+          </p:cNvCxnSpPr>
+          <p:nvPr/>
+        </p:nvCxnSpPr>
+        <p:spPr>
+          <a:xfrm>
+            <a:off x="3988122" y="4413710"/>
+            <a:ext cx="511870" cy="0"/>
+          </a:xfrm>
+          <a:prstGeom prst="straightConnector1">
+            <a:avLst/>
+          </a:prstGeom>
+          <a:ln>
+            <a:prstDash val="sysDot"/>
+            <a:tailEnd type="triangle"/>
+          </a:ln>
+        </p:spPr>
+        <p:style>
+          <a:lnRef idx="2">
+            <a:schemeClr val="accent2"/>
+          </a:lnRef>
+          <a:fillRef idx="0">
+            <a:schemeClr val="accent2"/>
+          </a:fillRef>
+          <a:effectRef idx="1">
+            <a:schemeClr val="accent2"/>
+          </a:effectRef>
+          <a:fontRef idx="minor">
+            <a:schemeClr val="tx1"/>
+          </a:fontRef>
+        </p:style>
+      </p:cxnSp>
+      <p:sp>
+        <p:nvSpPr>
+          <p:cNvPr id="1032" name="TextBox 1031">
+            <a:extLst>
+              <a:ext uri="{FF2B5EF4-FFF2-40B4-BE49-F238E27FC236}">
+                <a16:creationId xmlns:a16="http://schemas.microsoft.com/office/drawing/2014/main" id="{BB99ECFF-4311-96E6-6DF8-1EC74A81F862}"/>
+              </a:ext>
+            </a:extLst>
+          </p:cNvPr>
+          <p:cNvSpPr txBox="1"/>
+          <p:nvPr/>
+        </p:nvSpPr>
+        <p:spPr>
+          <a:xfrm>
+            <a:off x="8423163" y="4752372"/>
+            <a:ext cx="374915" cy="246221"/>
+          </a:xfrm>
+          <a:prstGeom prst="rect">
+            <a:avLst/>
+          </a:prstGeom>
+          <a:noFill/>
+        </p:spPr>
+        <p:txBody>
+          <a:bodyPr wrap="square" rtlCol="0">
+            <a:spAutoFit/>
+          </a:bodyPr>
+          <a:lstStyle/>
+          <a:p>
+            <a:pPr algn="ctr"/>
+            <a:r>
+              <a:rPr lang="en-IN" sz="1000" dirty="0"/>
+              <a:t>3V</a:t>
+            </a:r>
+          </a:p>
+        </p:txBody>
+      </p:sp>
+      <p:sp>
+        <p:nvSpPr>
+          <p:cNvPr id="1033" name="TextBox 1032">
+            <a:extLst>
+              <a:ext uri="{FF2B5EF4-FFF2-40B4-BE49-F238E27FC236}">
+                <a16:creationId xmlns:a16="http://schemas.microsoft.com/office/drawing/2014/main" id="{B3AC9555-9F83-2B18-93D3-7596E3A6CDA2}"/>
+              </a:ext>
+            </a:extLst>
+          </p:cNvPr>
+          <p:cNvSpPr txBox="1"/>
+          <p:nvPr/>
+        </p:nvSpPr>
+        <p:spPr>
+          <a:xfrm>
+            <a:off x="8423163" y="4500576"/>
+            <a:ext cx="374915" cy="246221"/>
+          </a:xfrm>
+          <a:prstGeom prst="rect">
+            <a:avLst/>
+          </a:prstGeom>
+          <a:noFill/>
+        </p:spPr>
+        <p:txBody>
+          <a:bodyPr wrap="square" rtlCol="0">
+            <a:spAutoFit/>
+          </a:bodyPr>
+          <a:lstStyle/>
+          <a:p>
+            <a:pPr algn="ctr"/>
+            <a:r>
+              <a:rPr lang="en-IN" sz="1000" dirty="0"/>
+              <a:t>I2C</a:t>
+            </a:r>
+          </a:p>
+        </p:txBody>
+      </p:sp>
+      <p:sp>
+        <p:nvSpPr>
+          <p:cNvPr id="1034" name="TextBox 1033">
+            <a:extLst>
+              <a:ext uri="{FF2B5EF4-FFF2-40B4-BE49-F238E27FC236}">
+                <a16:creationId xmlns:a16="http://schemas.microsoft.com/office/drawing/2014/main" id="{C5DD2790-8FB3-0A57-B25E-FEA272F9C918}"/>
+              </a:ext>
+            </a:extLst>
+          </p:cNvPr>
+          <p:cNvSpPr txBox="1"/>
+          <p:nvPr/>
+        </p:nvSpPr>
+        <p:spPr>
+          <a:xfrm>
+            <a:off x="8357519" y="4037996"/>
+            <a:ext cx="506202" cy="246221"/>
+          </a:xfrm>
+          <a:prstGeom prst="rect">
+            <a:avLst/>
+          </a:prstGeom>
+          <a:noFill/>
+        </p:spPr>
+        <p:txBody>
+          <a:bodyPr wrap="square" rtlCol="0">
+            <a:spAutoFit/>
+          </a:bodyPr>
+          <a:lstStyle/>
+          <a:p>
+            <a:pPr algn="ctr"/>
+            <a:r>
+              <a:rPr lang="en-IN" sz="1000" dirty="0"/>
+              <a:t>GPIOs</a:t>
+            </a:r>
+          </a:p>
+        </p:txBody>
+      </p:sp>
+      <p:sp>
+        <p:nvSpPr>
+          <p:cNvPr id="1035" name="TextBox 1034">
+            <a:extLst>
+              <a:ext uri="{FF2B5EF4-FFF2-40B4-BE49-F238E27FC236}">
+                <a16:creationId xmlns:a16="http://schemas.microsoft.com/office/drawing/2014/main" id="{21B5F892-3ED8-E4A2-0BF3-081A87FD37B8}"/>
+              </a:ext>
+            </a:extLst>
+          </p:cNvPr>
+          <p:cNvSpPr txBox="1"/>
+          <p:nvPr/>
+        </p:nvSpPr>
+        <p:spPr>
+          <a:xfrm>
+            <a:off x="8423163" y="4274080"/>
+            <a:ext cx="374915" cy="246221"/>
+          </a:xfrm>
+          <a:prstGeom prst="rect">
+            <a:avLst/>
+          </a:prstGeom>
+          <a:noFill/>
+        </p:spPr>
+        <p:txBody>
+          <a:bodyPr wrap="square" rtlCol="0">
+            <a:spAutoFit/>
+          </a:bodyPr>
+          <a:lstStyle/>
+          <a:p>
+            <a:pPr algn="ctr"/>
+            <a:r>
+              <a:rPr lang="en-IN" sz="1000" dirty="0"/>
+              <a:t>SPI</a:t>
+            </a:r>
+          </a:p>
+        </p:txBody>
+      </p:sp>
+      <p:cxnSp>
+        <p:nvCxnSpPr>
+          <p:cNvPr id="25" name="Straight Arrow Connector 24">
+            <a:extLst>
+              <a:ext uri="{FF2B5EF4-FFF2-40B4-BE49-F238E27FC236}">
+                <a16:creationId xmlns:a16="http://schemas.microsoft.com/office/drawing/2014/main" id="{13854B8E-7DC3-83F2-3117-003C629798AA}"/>
+              </a:ext>
+            </a:extLst>
+          </p:cNvPr>
+          <p:cNvCxnSpPr/>
+          <p:nvPr/>
+        </p:nvCxnSpPr>
+        <p:spPr>
+          <a:xfrm flipH="1">
+            <a:off x="3988122" y="3443702"/>
+            <a:ext cx="511870" cy="0"/>
+          </a:xfrm>
+          <a:prstGeom prst="straightConnector1">
+            <a:avLst/>
+          </a:prstGeom>
+          <a:ln>
+            <a:headEnd type="triangle" w="med" len="med"/>
+            <a:tailEnd type="triangle" w="med" len="med"/>
+          </a:ln>
+        </p:spPr>
+        <p:style>
+          <a:lnRef idx="2">
+            <a:schemeClr val="dk1"/>
+          </a:lnRef>
+          <a:fillRef idx="0">
+            <a:schemeClr val="dk1"/>
+          </a:fillRef>
+          <a:effectRef idx="1">
+            <a:schemeClr val="dk1"/>
+          </a:effectRef>
+          <a:fontRef idx="minor">
+            <a:schemeClr val="tx1"/>
+          </a:fontRef>
+        </p:style>
+      </p:cxnSp>
+      <p:cxnSp>
+        <p:nvCxnSpPr>
+          <p:cNvPr id="1037" name="Straight Arrow Connector 1036">
+            <a:extLst>
+              <a:ext uri="{FF2B5EF4-FFF2-40B4-BE49-F238E27FC236}">
+                <a16:creationId xmlns:a16="http://schemas.microsoft.com/office/drawing/2014/main" id="{F6E71412-3ECB-74FA-79B0-EA546E1ED039}"/>
+              </a:ext>
+            </a:extLst>
+          </p:cNvPr>
+          <p:cNvCxnSpPr/>
+          <p:nvPr/>
+        </p:nvCxnSpPr>
+        <p:spPr>
+          <a:xfrm>
+            <a:off x="8390570" y="4241064"/>
+            <a:ext cx="504056" cy="0"/>
+          </a:xfrm>
+          <a:prstGeom prst="straightConnector1">
+            <a:avLst/>
+          </a:prstGeom>
+          <a:ln>
+            <a:tailEnd type="triangle"/>
+          </a:ln>
+        </p:spPr>
+        <p:style>
+          <a:lnRef idx="2">
+            <a:schemeClr val="dk1"/>
+          </a:lnRef>
+          <a:fillRef idx="0">
+            <a:schemeClr val="dk1"/>
+          </a:fillRef>
+          <a:effectRef idx="1">
+            <a:schemeClr val="dk1"/>
+          </a:effectRef>
+          <a:fontRef idx="minor">
+            <a:schemeClr val="tx1"/>
+          </a:fontRef>
+        </p:style>
+      </p:cxnSp>
+      <p:cxnSp>
+        <p:nvCxnSpPr>
+          <p:cNvPr id="1038" name="Straight Arrow Connector 1037">
+            <a:extLst>
+              <a:ext uri="{FF2B5EF4-FFF2-40B4-BE49-F238E27FC236}">
+                <a16:creationId xmlns:a16="http://schemas.microsoft.com/office/drawing/2014/main" id="{4E1E925B-5B36-CD60-D26A-1E3AC2ACF087}"/>
+              </a:ext>
+            </a:extLst>
+          </p:cNvPr>
+          <p:cNvCxnSpPr/>
+          <p:nvPr/>
+        </p:nvCxnSpPr>
+        <p:spPr>
+          <a:xfrm>
+            <a:off x="8390570" y="4480210"/>
+            <a:ext cx="504056" cy="0"/>
+          </a:xfrm>
+          <a:prstGeom prst="straightConnector1">
+            <a:avLst/>
+          </a:prstGeom>
+          <a:ln>
+            <a:tailEnd type="triangle"/>
+          </a:ln>
+        </p:spPr>
+        <p:style>
+          <a:lnRef idx="2">
+            <a:schemeClr val="accent3"/>
+          </a:lnRef>
+          <a:fillRef idx="0">
+            <a:schemeClr val="accent3"/>
+          </a:fillRef>
+          <a:effectRef idx="1">
+            <a:schemeClr val="accent3"/>
+          </a:effectRef>
+          <a:fontRef idx="minor">
+            <a:schemeClr val="tx1"/>
+          </a:fontRef>
+        </p:style>
+      </p:cxnSp>
+      <p:cxnSp>
+        <p:nvCxnSpPr>
+          <p:cNvPr id="1039" name="Straight Arrow Connector 1038">
+            <a:extLst>
+              <a:ext uri="{FF2B5EF4-FFF2-40B4-BE49-F238E27FC236}">
+                <a16:creationId xmlns:a16="http://schemas.microsoft.com/office/drawing/2014/main" id="{DF1C324A-A204-8382-ACAE-89DB7B52DDAA}"/>
+              </a:ext>
+            </a:extLst>
+          </p:cNvPr>
+          <p:cNvCxnSpPr/>
+          <p:nvPr/>
+        </p:nvCxnSpPr>
+        <p:spPr>
+          <a:xfrm>
+            <a:off x="8390570" y="4719356"/>
+            <a:ext cx="504056" cy="0"/>
+          </a:xfrm>
+          <a:prstGeom prst="straightConnector1">
+            <a:avLst/>
+          </a:prstGeom>
+          <a:ln>
+            <a:tailEnd type="triangle"/>
+          </a:ln>
+        </p:spPr>
+        <p:style>
+          <a:lnRef idx="2">
+            <a:schemeClr val="accent4"/>
+          </a:lnRef>
+          <a:fillRef idx="0">
+            <a:schemeClr val="accent4"/>
+          </a:fillRef>
+          <a:effectRef idx="1">
+            <a:schemeClr val="accent4"/>
+          </a:effectRef>
+          <a:fontRef idx="minor">
+            <a:schemeClr val="tx1"/>
+          </a:fontRef>
+        </p:style>
+      </p:cxnSp>
+      <p:cxnSp>
+        <p:nvCxnSpPr>
+          <p:cNvPr id="1040" name="Straight Arrow Connector 1039">
+            <a:extLst>
+              <a:ext uri="{FF2B5EF4-FFF2-40B4-BE49-F238E27FC236}">
+                <a16:creationId xmlns:a16="http://schemas.microsoft.com/office/drawing/2014/main" id="{3FF626BC-91AA-8D3E-7434-BEA8E9AB8397}"/>
+              </a:ext>
+            </a:extLst>
+          </p:cNvPr>
+          <p:cNvCxnSpPr/>
+          <p:nvPr/>
+        </p:nvCxnSpPr>
+        <p:spPr>
+          <a:xfrm>
+            <a:off x="8390570" y="4958502"/>
+            <a:ext cx="504056" cy="0"/>
+          </a:xfrm>
+          <a:prstGeom prst="straightConnector1">
+            <a:avLst/>
+          </a:prstGeom>
+          <a:ln>
+            <a:tailEnd type="triangle"/>
+          </a:ln>
+        </p:spPr>
+        <p:style>
+          <a:lnRef idx="2">
+            <a:schemeClr val="accent2"/>
+          </a:lnRef>
+          <a:fillRef idx="0">
+            <a:schemeClr val="accent2"/>
+          </a:fillRef>
+          <a:effectRef idx="1">
+            <a:schemeClr val="accent2"/>
+          </a:effectRef>
+          <a:fontRef idx="minor">
+            <a:schemeClr val="tx1"/>
+          </a:fontRef>
+        </p:style>
+      </p:cxnSp>
+      <p:cxnSp>
+        <p:nvCxnSpPr>
+          <p:cNvPr id="1046" name="Straight Arrow Connector 1045">
+            <a:extLst>
+              <a:ext uri="{FF2B5EF4-FFF2-40B4-BE49-F238E27FC236}">
+                <a16:creationId xmlns:a16="http://schemas.microsoft.com/office/drawing/2014/main" id="{1E4A8E98-EDAA-FFA3-701C-D2B3DB276583}"/>
+              </a:ext>
+            </a:extLst>
+          </p:cNvPr>
+          <p:cNvCxnSpPr>
+            <a:cxnSpLocks/>
+          </p:cNvCxnSpPr>
+          <p:nvPr/>
+        </p:nvCxnSpPr>
+        <p:spPr>
+          <a:xfrm>
+            <a:off x="2181781" y="3249291"/>
+            <a:ext cx="517837" cy="0"/>
+          </a:xfrm>
+          <a:prstGeom prst="straightConnector1">
+            <a:avLst/>
+          </a:prstGeom>
+          <a:ln>
+            <a:headEnd type="triangle" w="med" len="med"/>
+            <a:tailEnd type="triangle" w="med" len="med"/>
+          </a:ln>
+        </p:spPr>
+        <p:style>
+          <a:lnRef idx="2">
+            <a:schemeClr val="accent5"/>
+          </a:lnRef>
+          <a:fillRef idx="0">
+            <a:schemeClr val="accent5"/>
+          </a:fillRef>
+          <a:effectRef idx="1">
+            <a:schemeClr val="accent5"/>
+          </a:effectRef>
+          <a:fontRef idx="minor">
+            <a:schemeClr val="tx1"/>
+          </a:fontRef>
+        </p:style>
+      </p:cxnSp>
+      <p:cxnSp>
+        <p:nvCxnSpPr>
+          <p:cNvPr id="1049" name="Connector: Elbow 1048">
+            <a:extLst>
+              <a:ext uri="{FF2B5EF4-FFF2-40B4-BE49-F238E27FC236}">
+                <a16:creationId xmlns:a16="http://schemas.microsoft.com/office/drawing/2014/main" id="{93D6D139-1527-4BD7-841A-B7D954442917}"/>
+              </a:ext>
+            </a:extLst>
+          </p:cNvPr>
+          <p:cNvCxnSpPr>
+            <a:cxnSpLocks/>
+          </p:cNvCxnSpPr>
+          <p:nvPr/>
+        </p:nvCxnSpPr>
+        <p:spPr>
+          <a:xfrm>
+            <a:off x="2153322" y="3447005"/>
+            <a:ext cx="540000" cy="684000"/>
+          </a:xfrm>
+          <a:prstGeom prst="bentConnector3">
+            <a:avLst>
+              <a:gd name="adj1" fmla="val 49501"/>
+            </a:avLst>
+          </a:prstGeom>
+          <a:ln>
+            <a:solidFill>
+              <a:srgbClr val="FF0000"/>
+            </a:solidFill>
+            <a:tailEnd type="triangle"/>
+          </a:ln>
+        </p:spPr>
+        <p:style>
+          <a:lnRef idx="2">
+            <a:schemeClr val="accent2"/>
+          </a:lnRef>
+          <a:fillRef idx="0">
+            <a:schemeClr val="accent2"/>
+          </a:fillRef>
+          <a:effectRef idx="1">
+            <a:schemeClr val="accent2"/>
+          </a:effectRef>
+          <a:fontRef idx="minor">
+            <a:schemeClr val="tx1"/>
+          </a:fontRef>
+        </p:style>
+      </p:cxnSp>
+      <p:sp>
+        <p:nvSpPr>
+          <p:cNvPr id="1042" name="Rectangle 1041">
+            <a:extLst>
+              <a:ext uri="{FF2B5EF4-FFF2-40B4-BE49-F238E27FC236}">
+                <a16:creationId xmlns:a16="http://schemas.microsoft.com/office/drawing/2014/main" id="{BBFDE6AA-C51C-13D1-85BD-C79A1BF5815B}"/>
+              </a:ext>
+            </a:extLst>
+          </p:cNvPr>
+          <p:cNvSpPr/>
+          <p:nvPr/>
+        </p:nvSpPr>
+        <p:spPr>
+          <a:xfrm>
+            <a:off x="892981" y="2546661"/>
+            <a:ext cx="1288800" cy="1080000"/>
+          </a:xfrm>
+          <a:prstGeom prst="rect">
+            <a:avLst/>
+          </a:prstGeom>
+        </p:spPr>
+        <p:style>
+          <a:lnRef idx="2">
+            <a:schemeClr val="accent1">
+              <a:shade val="15000"/>
+            </a:schemeClr>
+          </a:lnRef>
+          <a:fillRef idx="1">
+            <a:schemeClr val="accent1"/>
+          </a:fillRef>
+          <a:effectRef idx="0">
+            <a:schemeClr val="accent1"/>
+          </a:effectRef>
+          <a:fontRef idx="minor">
+            <a:schemeClr val="lt1"/>
+          </a:fontRef>
+        </p:style>
+        <p:txBody>
+          <a:bodyPr rtlCol="0" anchor="ctr"/>
+          <a:lstStyle/>
+          <a:p>
+            <a:pPr algn="ctr"/>
+            <a:r>
+              <a:rPr lang="en-IN" sz="1400" dirty="0"/>
+              <a:t>Debug</a:t>
+            </a:r>
+          </a:p>
+          <a:p>
+            <a:pPr algn="ctr"/>
+            <a:r>
+              <a:rPr lang="en-IN" sz="1400" dirty="0"/>
+              <a:t>Connector</a:t>
+            </a:r>
+          </a:p>
+          <a:p>
+            <a:pPr algn="ctr"/>
+            <a:r>
+              <a:rPr lang="en-IN" sz="1400" dirty="0"/>
+              <a:t>+</a:t>
+            </a:r>
+          </a:p>
+          <a:p>
+            <a:pPr algn="ctr"/>
+            <a:r>
+              <a:rPr lang="en-IN" sz="1400" dirty="0"/>
+              <a:t>UCB-C</a:t>
+            </a:r>
+          </a:p>
+        </p:txBody>
+      </p:sp>
+      <p:cxnSp>
+        <p:nvCxnSpPr>
+          <p:cNvPr id="1056" name="Straight Arrow Connector 1055">
+            <a:extLst>
+              <a:ext uri="{FF2B5EF4-FFF2-40B4-BE49-F238E27FC236}">
+                <a16:creationId xmlns:a16="http://schemas.microsoft.com/office/drawing/2014/main" id="{3CA773A9-3305-52BE-E478-0D0CAF67D778}"/>
+              </a:ext>
+            </a:extLst>
+          </p:cNvPr>
+          <p:cNvCxnSpPr/>
+          <p:nvPr/>
+        </p:nvCxnSpPr>
+        <p:spPr>
+          <a:xfrm>
+            <a:off x="8390570" y="5197648"/>
+            <a:ext cx="504056" cy="0"/>
+          </a:xfrm>
+          <a:prstGeom prst="straightConnector1">
+            <a:avLst/>
+          </a:prstGeom>
+          <a:ln>
+            <a:solidFill>
+              <a:srgbClr val="FF0000"/>
+            </a:solidFill>
+            <a:tailEnd type="triangle"/>
+          </a:ln>
+        </p:spPr>
+        <p:style>
+          <a:lnRef idx="2">
+            <a:schemeClr val="accent2"/>
+          </a:lnRef>
+          <a:fillRef idx="0">
+            <a:schemeClr val="accent2"/>
+          </a:fillRef>
+          <a:effectRef idx="1">
+            <a:schemeClr val="accent2"/>
+          </a:effectRef>
+          <a:fontRef idx="minor">
+            <a:schemeClr val="tx1"/>
+          </a:fontRef>
+        </p:style>
+      </p:cxnSp>
+      <p:cxnSp>
+        <p:nvCxnSpPr>
+          <p:cNvPr id="1057" name="Straight Arrow Connector 1056">
+            <a:extLst>
+              <a:ext uri="{FF2B5EF4-FFF2-40B4-BE49-F238E27FC236}">
+                <a16:creationId xmlns:a16="http://schemas.microsoft.com/office/drawing/2014/main" id="{9DF1585F-7C50-8255-1156-09CCEC9C4FDF}"/>
+              </a:ext>
+            </a:extLst>
+          </p:cNvPr>
+          <p:cNvCxnSpPr/>
+          <p:nvPr/>
+        </p:nvCxnSpPr>
+        <p:spPr>
+          <a:xfrm>
+            <a:off x="8388424" y="4001918"/>
+            <a:ext cx="504056" cy="0"/>
+          </a:xfrm>
+          <a:prstGeom prst="straightConnector1">
+            <a:avLst/>
+          </a:prstGeom>
+          <a:ln>
+            <a:tailEnd type="triangle"/>
+          </a:ln>
+        </p:spPr>
+        <p:style>
+          <a:lnRef idx="2">
+            <a:schemeClr val="accent5"/>
+          </a:lnRef>
+          <a:fillRef idx="0">
+            <a:schemeClr val="accent5"/>
+          </a:fillRef>
+          <a:effectRef idx="1">
+            <a:schemeClr val="accent5"/>
+          </a:effectRef>
+          <a:fontRef idx="minor">
+            <a:schemeClr val="tx1"/>
+          </a:fontRef>
+        </p:style>
+      </p:cxnSp>
+      <p:sp>
+        <p:nvSpPr>
+          <p:cNvPr id="1058" name="TextBox 1057">
+            <a:extLst>
+              <a:ext uri="{FF2B5EF4-FFF2-40B4-BE49-F238E27FC236}">
+                <a16:creationId xmlns:a16="http://schemas.microsoft.com/office/drawing/2014/main" id="{A2818B0F-48BA-AF4D-DD6F-4EBB42409744}"/>
+              </a:ext>
+            </a:extLst>
+          </p:cNvPr>
+          <p:cNvSpPr txBox="1"/>
+          <p:nvPr/>
+        </p:nvSpPr>
+        <p:spPr>
+          <a:xfrm>
+            <a:off x="8172400" y="4988498"/>
+            <a:ext cx="936104" cy="246221"/>
+          </a:xfrm>
+          <a:prstGeom prst="rect">
+            <a:avLst/>
+          </a:prstGeom>
+          <a:noFill/>
+        </p:spPr>
+        <p:txBody>
+          <a:bodyPr wrap="square" rtlCol="0">
+            <a:spAutoFit/>
+          </a:bodyPr>
+          <a:lstStyle/>
+          <a:p>
+            <a:pPr algn="ctr"/>
+            <a:r>
+              <a:rPr lang="en-IN" sz="1000" dirty="0"/>
+              <a:t>EXT/BATT_IN</a:t>
+            </a:r>
+          </a:p>
+        </p:txBody>
+      </p:sp>
+      <p:sp>
+        <p:nvSpPr>
+          <p:cNvPr id="1059" name="TextBox 1058">
+            <a:extLst>
+              <a:ext uri="{FF2B5EF4-FFF2-40B4-BE49-F238E27FC236}">
+                <a16:creationId xmlns:a16="http://schemas.microsoft.com/office/drawing/2014/main" id="{6523E25B-5F0E-0BCD-B02D-2CAFB1F333BB}"/>
+              </a:ext>
+            </a:extLst>
+          </p:cNvPr>
+          <p:cNvSpPr txBox="1"/>
+          <p:nvPr/>
+        </p:nvSpPr>
+        <p:spPr>
+          <a:xfrm>
+            <a:off x="8256946" y="3781592"/>
+            <a:ext cx="707348" cy="246221"/>
+          </a:xfrm>
+          <a:prstGeom prst="rect">
+            <a:avLst/>
+          </a:prstGeom>
+          <a:noFill/>
+        </p:spPr>
+        <p:txBody>
+          <a:bodyPr wrap="square" rtlCol="0">
+            <a:spAutoFit/>
+          </a:bodyPr>
+          <a:lstStyle/>
+          <a:p>
+            <a:pPr algn="ctr"/>
+            <a:r>
+              <a:rPr lang="en-IN" sz="1000" dirty="0"/>
+              <a:t>SDI/UART</a:t>
+            </a:r>
+          </a:p>
+        </p:txBody>
+      </p:sp>
+      <p:sp>
+        <p:nvSpPr>
+          <p:cNvPr id="1060" name="Rectangle 1059">
+            <a:extLst>
+              <a:ext uri="{FF2B5EF4-FFF2-40B4-BE49-F238E27FC236}">
+                <a16:creationId xmlns:a16="http://schemas.microsoft.com/office/drawing/2014/main" id="{CE74FC50-E119-0C65-A32A-12915FEA7829}"/>
+              </a:ext>
+            </a:extLst>
+          </p:cNvPr>
+          <p:cNvSpPr/>
+          <p:nvPr/>
+        </p:nvSpPr>
+        <p:spPr>
+          <a:xfrm>
+            <a:off x="892981" y="1212503"/>
+            <a:ext cx="1294767" cy="1091034"/>
+          </a:xfrm>
+          <a:prstGeom prst="rect">
+            <a:avLst/>
+          </a:prstGeom>
+        </p:spPr>
+        <p:style>
+          <a:lnRef idx="2">
+            <a:schemeClr val="accent1">
+              <a:shade val="15000"/>
+            </a:schemeClr>
+          </a:lnRef>
+          <a:fillRef idx="1">
+            <a:schemeClr val="accent1"/>
+          </a:fillRef>
+          <a:effectRef idx="0">
+            <a:schemeClr val="accent1"/>
+          </a:effectRef>
+          <a:fontRef idx="minor">
+            <a:schemeClr val="lt1"/>
+          </a:fontRef>
+        </p:style>
+        <p:txBody>
+          <a:bodyPr rtlCol="0" anchor="ctr"/>
+          <a:lstStyle/>
+          <a:p>
+            <a:pPr algn="ctr"/>
+            <a:r>
+              <a:rPr lang="en-IN" sz="1400" dirty="0"/>
+              <a:t>LEDs + BTN</a:t>
+            </a:r>
+          </a:p>
+        </p:txBody>
+      </p:sp>
+      <p:cxnSp>
+        <p:nvCxnSpPr>
+          <p:cNvPr id="1063" name="Connector: Elbow 1062">
+            <a:extLst>
+              <a:ext uri="{FF2B5EF4-FFF2-40B4-BE49-F238E27FC236}">
+                <a16:creationId xmlns:a16="http://schemas.microsoft.com/office/drawing/2014/main" id="{2711B968-70D1-BE67-20B6-D481E9252750}"/>
+              </a:ext>
+            </a:extLst>
+          </p:cNvPr>
+          <p:cNvCxnSpPr>
+            <a:cxnSpLocks/>
+            <a:stCxn id="1060" idx="3"/>
+            <a:endCxn id="5" idx="1"/>
+          </p:cNvCxnSpPr>
+          <p:nvPr/>
+        </p:nvCxnSpPr>
+        <p:spPr>
+          <a:xfrm>
+            <a:off x="2187748" y="1758020"/>
+            <a:ext cx="511870" cy="972000"/>
+          </a:xfrm>
+          <a:prstGeom prst="bentConnector3">
+            <a:avLst>
+              <a:gd name="adj1" fmla="val 45092"/>
+            </a:avLst>
+          </a:prstGeom>
+          <a:ln>
+            <a:tailEnd type="triangle"/>
+          </a:ln>
+        </p:spPr>
+        <p:style>
+          <a:lnRef idx="2">
+            <a:schemeClr val="dk1"/>
+          </a:lnRef>
+          <a:fillRef idx="0">
+            <a:schemeClr val="dk1"/>
+          </a:fillRef>
+          <a:effectRef idx="1">
+            <a:schemeClr val="dk1"/>
+          </a:effectRef>
+          <a:fontRef idx="minor">
+            <a:schemeClr val="tx1"/>
+          </a:fontRef>
+        </p:style>
+      </p:cxnSp>
+      <p:sp>
+        <p:nvSpPr>
+          <p:cNvPr id="6" name="Rectangle 5">
+            <a:extLst>
+              <a:ext uri="{FF2B5EF4-FFF2-40B4-BE49-F238E27FC236}">
+                <a16:creationId xmlns:a16="http://schemas.microsoft.com/office/drawing/2014/main" id="{40B70F18-61F3-741B-98AF-0EDBCECA693C}"/>
+              </a:ext>
+            </a:extLst>
+          </p:cNvPr>
+          <p:cNvSpPr/>
+          <p:nvPr/>
+        </p:nvSpPr>
+        <p:spPr>
+          <a:xfrm>
+            <a:off x="2699618" y="3873650"/>
+            <a:ext cx="1288504" cy="1080120"/>
+          </a:xfrm>
+          <a:prstGeom prst="rect">
+            <a:avLst/>
+          </a:prstGeom>
+        </p:spPr>
+        <p:style>
+          <a:lnRef idx="2">
+            <a:schemeClr val="accent1">
+              <a:shade val="15000"/>
+            </a:schemeClr>
+          </a:lnRef>
+          <a:fillRef idx="1">
+            <a:schemeClr val="accent1"/>
+          </a:fillRef>
+          <a:effectRef idx="0">
+            <a:schemeClr val="accent1"/>
+          </a:effectRef>
+          <a:fontRef idx="minor">
+            <a:schemeClr val="lt1"/>
+          </a:fontRef>
+        </p:style>
+        <p:txBody>
+          <a:bodyPr rtlCol="0" anchor="ctr"/>
+          <a:lstStyle/>
+          <a:p>
+            <a:pPr algn="ctr"/>
+            <a:r>
+              <a:rPr lang="en-IN" sz="1400" dirty="0"/>
+              <a:t>LP PMIC</a:t>
+            </a:r>
+          </a:p>
+          <a:p>
+            <a:pPr algn="ctr"/>
+            <a:r>
+              <a:rPr lang="en-IN" sz="1400" dirty="0"/>
+              <a:t>(nPM2100)</a:t>
+            </a:r>
+          </a:p>
+        </p:txBody>
+      </p:sp>
+      <p:sp>
+        <p:nvSpPr>
+          <p:cNvPr id="14" name="Rectangle 13">
+            <a:extLst>
+              <a:ext uri="{FF2B5EF4-FFF2-40B4-BE49-F238E27FC236}">
+                <a16:creationId xmlns:a16="http://schemas.microsoft.com/office/drawing/2014/main" id="{090AC410-9847-BFB2-EB52-524F1478D243}"/>
+              </a:ext>
+            </a:extLst>
+          </p:cNvPr>
+          <p:cNvSpPr/>
+          <p:nvPr/>
+        </p:nvSpPr>
+        <p:spPr>
+          <a:xfrm>
+            <a:off x="899244" y="3873649"/>
+            <a:ext cx="1288504" cy="1080120"/>
+          </a:xfrm>
+          <a:prstGeom prst="rect">
+            <a:avLst/>
+          </a:prstGeom>
+        </p:spPr>
+        <p:style>
+          <a:lnRef idx="2">
+            <a:schemeClr val="accent1">
+              <a:shade val="15000"/>
+            </a:schemeClr>
+          </a:lnRef>
+          <a:fillRef idx="1">
+            <a:schemeClr val="accent1"/>
+          </a:fillRef>
+          <a:effectRef idx="0">
+            <a:schemeClr val="accent1"/>
+          </a:effectRef>
+          <a:fontRef idx="minor">
+            <a:schemeClr val="lt1"/>
+          </a:fontRef>
+        </p:style>
+        <p:txBody>
+          <a:bodyPr rtlCol="0" anchor="ctr"/>
+          <a:lstStyle/>
+          <a:p>
+            <a:pPr algn="ctr"/>
+            <a:r>
+              <a:rPr lang="en-IN" sz="1400" dirty="0"/>
+              <a:t>3V Coin Cell</a:t>
+            </a:r>
+            <a:endParaRPr lang="en-IN" sz="1400" b="0" i="0" dirty="0">
+              <a:solidFill>
+                <a:srgbClr val="FFFFFF"/>
+              </a:solidFill>
+              <a:effectLst/>
+            </a:endParaRPr>
+          </a:p>
+        </p:txBody>
+      </p:sp>
+      <p:sp>
+        <p:nvSpPr>
+          <p:cNvPr id="5" name="Rectangle 4">
+            <a:extLst>
+              <a:ext uri="{FF2B5EF4-FFF2-40B4-BE49-F238E27FC236}">
+                <a16:creationId xmlns:a16="http://schemas.microsoft.com/office/drawing/2014/main" id="{DE577C64-CCD2-B5F3-4C9C-045819313AE2}"/>
+              </a:ext>
+            </a:extLst>
+          </p:cNvPr>
+          <p:cNvSpPr/>
+          <p:nvPr/>
+        </p:nvSpPr>
+        <p:spPr>
+          <a:xfrm>
+            <a:off x="2699618" y="2541502"/>
+            <a:ext cx="1288504" cy="1080120"/>
+          </a:xfrm>
+          <a:prstGeom prst="rect">
+            <a:avLst/>
+          </a:prstGeom>
+        </p:spPr>
+        <p:style>
+          <a:lnRef idx="2">
+            <a:schemeClr val="accent1">
+              <a:shade val="15000"/>
+            </a:schemeClr>
+          </a:lnRef>
+          <a:fillRef idx="1">
+            <a:schemeClr val="accent1"/>
+          </a:fillRef>
+          <a:effectRef idx="0">
+            <a:schemeClr val="accent1"/>
+          </a:effectRef>
+          <a:fontRef idx="minor">
+            <a:schemeClr val="lt1"/>
+          </a:fontRef>
+        </p:style>
+        <p:txBody>
+          <a:bodyPr rtlCol="0" anchor="ctr"/>
+          <a:lstStyle/>
+          <a:p>
+            <a:pPr algn="ctr"/>
+            <a:r>
+              <a:rPr lang="en-IN" sz="1400" dirty="0"/>
+              <a:t>LP MCU</a:t>
+            </a:r>
+          </a:p>
+          <a:p>
+            <a:pPr algn="ctr"/>
+            <a:r>
+              <a:rPr lang="en-IN" sz="1400" dirty="0"/>
+              <a:t>(</a:t>
+            </a:r>
+            <a:r>
+              <a:rPr lang="en-IN" sz="1400" b="0" i="0" dirty="0">
+                <a:solidFill>
+                  <a:srgbClr val="FFFFFF"/>
+                </a:solidFill>
+                <a:effectLst/>
+              </a:rPr>
+              <a:t>nRF52840)</a:t>
+            </a:r>
+          </a:p>
+        </p:txBody>
+      </p:sp>
+      <p:sp>
+        <p:nvSpPr>
+          <p:cNvPr id="1077" name="TextBox 1076">
+            <a:extLst>
+              <a:ext uri="{FF2B5EF4-FFF2-40B4-BE49-F238E27FC236}">
+                <a16:creationId xmlns:a16="http://schemas.microsoft.com/office/drawing/2014/main" id="{32D41D5D-7B09-0748-17E9-9B55D631143F}"/>
+              </a:ext>
+            </a:extLst>
+          </p:cNvPr>
+          <p:cNvSpPr txBox="1"/>
+          <p:nvPr/>
+        </p:nvSpPr>
+        <p:spPr>
+          <a:xfrm>
+            <a:off x="8274013" y="3540673"/>
+            <a:ext cx="673215" cy="246221"/>
+          </a:xfrm>
+          <a:prstGeom prst="rect">
+            <a:avLst/>
+          </a:prstGeom>
+          <a:noFill/>
+        </p:spPr>
+        <p:txBody>
+          <a:bodyPr wrap="square" rtlCol="0">
+            <a:spAutoFit/>
+          </a:bodyPr>
+          <a:lstStyle/>
+          <a:p>
+            <a:pPr algn="ctr"/>
+            <a:r>
+              <a:rPr lang="en-IN" sz="1000" dirty="0"/>
+              <a:t>LED CTRL</a:t>
+            </a:r>
+          </a:p>
+        </p:txBody>
+      </p:sp>
+      <p:cxnSp>
+        <p:nvCxnSpPr>
+          <p:cNvPr id="1078" name="Straight Arrow Connector 1077">
+            <a:extLst>
+              <a:ext uri="{FF2B5EF4-FFF2-40B4-BE49-F238E27FC236}">
+                <a16:creationId xmlns:a16="http://schemas.microsoft.com/office/drawing/2014/main" id="{9D0C8426-C1BF-C989-A502-E3808EE24D57}"/>
+              </a:ext>
+            </a:extLst>
+          </p:cNvPr>
+          <p:cNvCxnSpPr/>
+          <p:nvPr/>
+        </p:nvCxnSpPr>
+        <p:spPr>
+          <a:xfrm>
+            <a:off x="8375659" y="3762772"/>
+            <a:ext cx="504056" cy="0"/>
+          </a:xfrm>
+          <a:prstGeom prst="straightConnector1">
+            <a:avLst/>
+          </a:prstGeom>
+          <a:ln>
+            <a:tailEnd type="triangle"/>
+          </a:ln>
+        </p:spPr>
+        <p:style>
+          <a:lnRef idx="2">
+            <a:schemeClr val="accent6"/>
+          </a:lnRef>
+          <a:fillRef idx="0">
+            <a:schemeClr val="accent6"/>
+          </a:fillRef>
+          <a:effectRef idx="1">
+            <a:schemeClr val="accent6"/>
+          </a:effectRef>
+          <a:fontRef idx="minor">
+            <a:schemeClr val="tx1"/>
+          </a:fontRef>
+        </p:style>
+      </p:cxnSp>
+      <p:sp>
+        <p:nvSpPr>
+          <p:cNvPr id="4" name="Rectangle 3">
+            <a:extLst>
+              <a:ext uri="{FF2B5EF4-FFF2-40B4-BE49-F238E27FC236}">
+                <a16:creationId xmlns:a16="http://schemas.microsoft.com/office/drawing/2014/main" id="{510F02AF-F152-61D3-E667-C1E932587023}"/>
+              </a:ext>
+            </a:extLst>
+          </p:cNvPr>
+          <p:cNvSpPr/>
+          <p:nvPr/>
+        </p:nvSpPr>
+        <p:spPr>
+          <a:xfrm>
+            <a:off x="4499992" y="2541502"/>
+            <a:ext cx="1288504" cy="1080120"/>
+          </a:xfrm>
+          <a:prstGeom prst="rect">
+            <a:avLst/>
+          </a:prstGeom>
+        </p:spPr>
+        <p:style>
+          <a:lnRef idx="2">
+            <a:schemeClr val="accent1">
+              <a:shade val="15000"/>
+            </a:schemeClr>
+          </a:lnRef>
+          <a:fillRef idx="1">
+            <a:schemeClr val="accent1"/>
+          </a:fillRef>
+          <a:effectRef idx="0">
+            <a:schemeClr val="accent1"/>
+          </a:effectRef>
+          <a:fontRef idx="minor">
+            <a:schemeClr val="lt1"/>
+          </a:fontRef>
+        </p:style>
+        <p:txBody>
+          <a:bodyPr rtlCol="0" anchor="ctr"/>
+          <a:lstStyle/>
+          <a:p>
+            <a:pPr algn="ctr"/>
+            <a:r>
+              <a:rPr lang="en-IN" sz="1400" dirty="0"/>
+              <a:t>Configurable Logic Block</a:t>
+            </a:r>
+          </a:p>
+          <a:p>
+            <a:pPr algn="ctr"/>
+            <a:r>
+              <a:rPr lang="en-IN" sz="1400" dirty="0"/>
+              <a:t>(PIC18F26Q35)</a:t>
+            </a:r>
+          </a:p>
+        </p:txBody>
+      </p:sp>
+      <p:cxnSp>
+        <p:nvCxnSpPr>
+          <p:cNvPr id="1084" name="Straight Arrow Connector 1083">
+            <a:extLst>
+              <a:ext uri="{FF2B5EF4-FFF2-40B4-BE49-F238E27FC236}">
+                <a16:creationId xmlns:a16="http://schemas.microsoft.com/office/drawing/2014/main" id="{BC9D3C8C-7A9B-7E3E-869D-EE6AE2A41A03}"/>
+              </a:ext>
+            </a:extLst>
+          </p:cNvPr>
+          <p:cNvCxnSpPr>
+            <a:stCxn id="8" idx="2"/>
+            <a:endCxn id="4" idx="0"/>
+          </p:cNvCxnSpPr>
+          <p:nvPr/>
+        </p:nvCxnSpPr>
+        <p:spPr>
+          <a:xfrm>
+            <a:off x="5144244" y="2289474"/>
+            <a:ext cx="0" cy="252028"/>
+          </a:xfrm>
+          <a:prstGeom prst="straightConnector1">
+            <a:avLst/>
+          </a:prstGeom>
+          <a:ln>
+            <a:headEnd type="triangle" w="med" len="med"/>
+            <a:tailEnd type="triangle" w="med" len="med"/>
+          </a:ln>
+        </p:spPr>
+        <p:style>
+          <a:lnRef idx="2">
+            <a:schemeClr val="accent4"/>
+          </a:lnRef>
+          <a:fillRef idx="0">
+            <a:schemeClr val="accent4"/>
+          </a:fillRef>
+          <a:effectRef idx="1">
+            <a:schemeClr val="accent4"/>
+          </a:effectRef>
+          <a:fontRef idx="minor">
+            <a:schemeClr val="tx1"/>
+          </a:fontRef>
+        </p:style>
+      </p:cxnSp>
+      <p:cxnSp>
+        <p:nvCxnSpPr>
+          <p:cNvPr id="1086" name="Straight Arrow Connector 1085">
+            <a:extLst>
+              <a:ext uri="{FF2B5EF4-FFF2-40B4-BE49-F238E27FC236}">
+                <a16:creationId xmlns:a16="http://schemas.microsoft.com/office/drawing/2014/main" id="{1CE9BB22-4297-E142-B3C0-BA16D2D322AA}"/>
+              </a:ext>
+            </a:extLst>
+          </p:cNvPr>
+          <p:cNvCxnSpPr>
+            <a:stCxn id="4" idx="2"/>
+            <a:endCxn id="7" idx="0"/>
+          </p:cNvCxnSpPr>
+          <p:nvPr/>
+        </p:nvCxnSpPr>
+        <p:spPr>
+          <a:xfrm>
+            <a:off x="5144244" y="3621622"/>
+            <a:ext cx="0" cy="252028"/>
+          </a:xfrm>
+          <a:prstGeom prst="straightConnector1">
+            <a:avLst/>
+          </a:prstGeom>
+          <a:ln>
+            <a:headEnd type="triangle" w="med" len="med"/>
+            <a:tailEnd type="triangle" w="med" len="med"/>
+          </a:ln>
+        </p:spPr>
+        <p:style>
+          <a:lnRef idx="2">
+            <a:schemeClr val="accent4"/>
+          </a:lnRef>
+          <a:fillRef idx="0">
+            <a:schemeClr val="accent4"/>
+          </a:fillRef>
+          <a:effectRef idx="1">
+            <a:schemeClr val="accent4"/>
+          </a:effectRef>
+          <a:fontRef idx="minor">
+            <a:schemeClr val="tx1"/>
+          </a:fontRef>
+        </p:style>
+      </p:cxnSp>
+      <p:cxnSp>
+        <p:nvCxnSpPr>
+          <p:cNvPr id="22528" name="Straight Arrow Connector 22527">
+            <a:extLst>
+              <a:ext uri="{FF2B5EF4-FFF2-40B4-BE49-F238E27FC236}">
+                <a16:creationId xmlns:a16="http://schemas.microsoft.com/office/drawing/2014/main" id="{067ED06F-2C10-9E64-16EF-1903AE3370F5}"/>
+              </a:ext>
+            </a:extLst>
+          </p:cNvPr>
+          <p:cNvCxnSpPr>
+            <a:stCxn id="1042" idx="3"/>
+            <a:endCxn id="5" idx="1"/>
+          </p:cNvCxnSpPr>
+          <p:nvPr/>
+        </p:nvCxnSpPr>
+        <p:spPr>
+          <a:xfrm flipV="1">
+            <a:off x="2181781" y="3081562"/>
+            <a:ext cx="517837" cy="5099"/>
+          </a:xfrm>
+          <a:prstGeom prst="straightConnector1">
+            <a:avLst/>
+          </a:prstGeom>
+          <a:ln>
+            <a:solidFill>
+              <a:schemeClr val="bg1">
+                <a:lumMod val="50000"/>
+              </a:schemeClr>
+            </a:solidFill>
+            <a:headEnd type="triangle" w="med" len="med"/>
+            <a:tailEnd type="triangle" w="med" len="med"/>
+          </a:ln>
+        </p:spPr>
+        <p:style>
+          <a:lnRef idx="2">
+            <a:schemeClr val="dk1"/>
+          </a:lnRef>
+          <a:fillRef idx="0">
+            <a:schemeClr val="dk1"/>
+          </a:fillRef>
+          <a:effectRef idx="1">
+            <a:schemeClr val="dk1"/>
+          </a:effectRef>
+          <a:fontRef idx="minor">
+            <a:schemeClr val="tx1"/>
+          </a:fontRef>
+        </p:style>
+      </p:cxnSp>
+      <p:sp>
+        <p:nvSpPr>
+          <p:cNvPr id="22529" name="TextBox 22528">
+            <a:extLst>
+              <a:ext uri="{FF2B5EF4-FFF2-40B4-BE49-F238E27FC236}">
+                <a16:creationId xmlns:a16="http://schemas.microsoft.com/office/drawing/2014/main" id="{19DADA5E-B333-A98E-74DA-B1B7B1C25AD0}"/>
+              </a:ext>
+            </a:extLst>
+          </p:cNvPr>
+          <p:cNvSpPr txBox="1"/>
+          <p:nvPr/>
+        </p:nvSpPr>
+        <p:spPr>
+          <a:xfrm>
+            <a:off x="8275177" y="3316524"/>
+            <a:ext cx="673215" cy="246221"/>
+          </a:xfrm>
+          <a:prstGeom prst="rect">
+            <a:avLst/>
+          </a:prstGeom>
+          <a:noFill/>
+        </p:spPr>
+        <p:txBody>
+          <a:bodyPr wrap="square" rtlCol="0">
+            <a:spAutoFit/>
+          </a:bodyPr>
+          <a:lstStyle/>
+          <a:p>
+            <a:pPr algn="ctr"/>
+            <a:r>
+              <a:rPr lang="en-IN" sz="1000" dirty="0"/>
+              <a:t>USB</a:t>
+            </a:r>
+          </a:p>
+        </p:txBody>
+      </p:sp>
+      <p:cxnSp>
+        <p:nvCxnSpPr>
+          <p:cNvPr id="22531" name="Straight Arrow Connector 22530">
+            <a:extLst>
+              <a:ext uri="{FF2B5EF4-FFF2-40B4-BE49-F238E27FC236}">
+                <a16:creationId xmlns:a16="http://schemas.microsoft.com/office/drawing/2014/main" id="{40D6DE25-9502-1254-006D-E3330D0BB4A4}"/>
+              </a:ext>
+            </a:extLst>
+          </p:cNvPr>
+          <p:cNvCxnSpPr/>
+          <p:nvPr/>
+        </p:nvCxnSpPr>
+        <p:spPr>
+          <a:xfrm>
+            <a:off x="8376823" y="3538623"/>
+            <a:ext cx="504056" cy="0"/>
+          </a:xfrm>
+          <a:prstGeom prst="straightConnector1">
+            <a:avLst/>
+          </a:prstGeom>
+          <a:ln>
+            <a:solidFill>
+              <a:schemeClr val="bg1">
+                <a:lumMod val="50000"/>
+              </a:schemeClr>
+            </a:solidFill>
+            <a:tailEnd type="triangle"/>
+          </a:ln>
+        </p:spPr>
+        <p:style>
+          <a:lnRef idx="2">
+            <a:schemeClr val="accent6"/>
+          </a:lnRef>
+          <a:fillRef idx="0">
+            <a:schemeClr val="accent6"/>
+          </a:fillRef>
+          <a:effectRef idx="1">
+            <a:schemeClr val="accent6"/>
+          </a:effectRef>
+          <a:fontRef idx="minor">
+            <a:schemeClr val="tx1"/>
+          </a:fontRef>
+        </p:style>
+      </p:cxnSp>
+      <p:sp>
+        <p:nvSpPr>
+          <p:cNvPr id="10" name="Rectangle 9">
+            <a:extLst>
+              <a:ext uri="{FF2B5EF4-FFF2-40B4-BE49-F238E27FC236}">
+                <a16:creationId xmlns:a16="http://schemas.microsoft.com/office/drawing/2014/main" id="{AD3D6707-82A7-FFF6-AFB1-A063182C4546}"/>
+              </a:ext>
+            </a:extLst>
+          </p:cNvPr>
+          <p:cNvSpPr/>
+          <p:nvPr/>
+        </p:nvSpPr>
+        <p:spPr>
+          <a:xfrm>
+            <a:off x="6300366" y="1217564"/>
+            <a:ext cx="1749871" cy="3736205"/>
+          </a:xfrm>
+          <a:prstGeom prst="rect">
+            <a:avLst/>
+          </a:prstGeom>
+        </p:spPr>
+        <p:style>
+          <a:lnRef idx="2">
+            <a:schemeClr val="accent1">
+              <a:shade val="15000"/>
+            </a:schemeClr>
+          </a:lnRef>
+          <a:fillRef idx="1">
+            <a:schemeClr val="accent1"/>
+          </a:fillRef>
+          <a:effectRef idx="0">
+            <a:schemeClr val="accent1"/>
+          </a:effectRef>
+          <a:fontRef idx="minor">
+            <a:schemeClr val="lt1"/>
+          </a:fontRef>
+        </p:style>
+        <p:txBody>
+          <a:bodyPr rtlCol="0" anchor="ctr"/>
+          <a:lstStyle/>
+          <a:p>
+            <a:pPr algn="ctr"/>
+            <a:r>
+              <a:rPr lang="en-IN" sz="1400" dirty="0"/>
+              <a:t>Discrete LED matrix</a:t>
             </a:r>
           </a:p>
         </p:txBody>
@@ -10566,7 +13975,7 @@
             <a:fld id="{8D12EC46-F5D3-4572-AED1-9CCC8CB80B60}" type="datetime1">
               <a:rPr lang="en-US" smtClean="0"/>
               <a:pPr/>
-              <a:t>6/21/2026</a:t>
+              <a:t>6/22/2026</a:t>
             </a:fld>
             <a:endParaRPr lang="en-US" dirty="0"/>
           </a:p>
